--- a/fathah-plus/01-alif.pptx
+++ b/fathah-plus/01-alif.pptx
@@ -3428,6 +3428,78 @@
           </a:p>
         </p:txBody>
       </p:sp>
+      <p:pic>
+        <p:nvPicPr>
+          <p:cNvPr id="14" name="Image 0" descr="fish">    </p:cNvPr>
+          <p:cNvPicPr>
+            <a:picLocks noChangeAspect="1"/>
+          </p:cNvPicPr>
+          <p:nvPr/>
+        </p:nvPicPr>
+        <p:blipFill>
+          <a:blip r:embed="rId1"/>
+          <a:stretch>
+            <a:fillRect/>
+          </a:stretch>
+        </p:blipFill>
+        <p:spPr>
+          <a:xfrm>
+            <a:off x="91440" y="1783080"/>
+            <a:ext cx="1932219" cy="1554480"/>
+          </a:xfrm>
+          <a:prstGeom prst="rect">
+            <a:avLst/>
+          </a:prstGeom>
+        </p:spPr>
+      </p:pic>
+      <p:pic>
+        <p:nvPicPr>
+          <p:cNvPr id="15" name="Image 1" descr="bird">    </p:cNvPr>
+          <p:cNvPicPr>
+            <a:picLocks noChangeAspect="1"/>
+          </p:cNvPicPr>
+          <p:nvPr/>
+        </p:nvPicPr>
+        <p:blipFill>
+          <a:blip r:embed="rId2"/>
+          <a:stretch>
+            <a:fillRect/>
+          </a:stretch>
+        </p:blipFill>
+        <p:spPr>
+          <a:xfrm>
+            <a:off x="7836957" y="1783080"/>
+            <a:ext cx="1215603" cy="1554480"/>
+          </a:xfrm>
+          <a:prstGeom prst="rect">
+            <a:avLst/>
+          </a:prstGeom>
+        </p:spPr>
+      </p:pic>
+      <p:pic>
+        <p:nvPicPr>
+          <p:cNvPr id="16" name="Image 2" descr="bee">    </p:cNvPr>
+          <p:cNvPicPr>
+            <a:picLocks noChangeAspect="1"/>
+          </p:cNvPicPr>
+          <p:nvPr/>
+        </p:nvPicPr>
+        <p:blipFill>
+          <a:blip r:embed="rId3"/>
+          <a:stretch>
+            <a:fillRect/>
+          </a:stretch>
+        </p:blipFill>
+        <p:spPr>
+          <a:xfrm>
+            <a:off x="5507248" y="45720"/>
+            <a:ext cx="802112" cy="777240"/>
+          </a:xfrm>
+          <a:prstGeom prst="rect">
+            <a:avLst/>
+          </a:prstGeom>
+        </p:spPr>
+      </p:pic>
     </p:spTree>
   </p:cSld>
   <p:clrMapOvr>
@@ -4453,6 +4525,30 @@
           </a:p>
         </p:txBody>
       </p:sp>
+      <p:pic>
+        <p:nvPicPr>
+          <p:cNvPr id="32" name="Image 0" descr="bird4">    </p:cNvPr>
+          <p:cNvPicPr>
+            <a:picLocks noChangeAspect="1"/>
+          </p:cNvPicPr>
+          <p:nvPr/>
+        </p:nvPicPr>
+        <p:blipFill>
+          <a:blip r:embed="rId1"/>
+          <a:stretch>
+            <a:fillRect/>
+          </a:stretch>
+        </p:blipFill>
+        <p:spPr>
+          <a:xfrm>
+            <a:off x="1005840" y="45720"/>
+            <a:ext cx="1007303" cy="777240"/>
+          </a:xfrm>
+          <a:prstGeom prst="rect">
+            <a:avLst/>
+          </a:prstGeom>
+        </p:spPr>
+      </p:pic>
     </p:spTree>
   </p:cSld>
   <p:clrMapOvr>
@@ -5842,6 +5938,54 @@
           </a:p>
         </p:txBody>
       </p:sp>
+      <p:pic>
+        <p:nvPicPr>
+          <p:cNvPr id="29" name="Image 0" descr="duck">    </p:cNvPr>
+          <p:cNvPicPr>
+            <a:picLocks noChangeAspect="1"/>
+          </p:cNvPicPr>
+          <p:nvPr/>
+        </p:nvPicPr>
+        <p:blipFill>
+          <a:blip r:embed="rId1"/>
+          <a:stretch>
+            <a:fillRect/>
+          </a:stretch>
+        </p:blipFill>
+        <p:spPr>
+          <a:xfrm>
+            <a:off x="91440" y="3977640"/>
+            <a:ext cx="927202" cy="1097280"/>
+          </a:xfrm>
+          <a:prstGeom prst="rect">
+            <a:avLst/>
+          </a:prstGeom>
+        </p:spPr>
+      </p:pic>
+      <p:pic>
+        <p:nvPicPr>
+          <p:cNvPr id="30" name="Image 1" descr="bee">    </p:cNvPr>
+          <p:cNvPicPr>
+            <a:picLocks noChangeAspect="1"/>
+          </p:cNvPicPr>
+          <p:nvPr/>
+        </p:nvPicPr>
+        <p:blipFill>
+          <a:blip r:embed="rId2"/>
+          <a:stretch>
+            <a:fillRect/>
+          </a:stretch>
+        </p:blipFill>
+        <p:spPr>
+          <a:xfrm>
+            <a:off x="5507248" y="45720"/>
+            <a:ext cx="802112" cy="777240"/>
+          </a:xfrm>
+          <a:prstGeom prst="rect">
+            <a:avLst/>
+          </a:prstGeom>
+        </p:spPr>
+      </p:pic>
     </p:spTree>
   </p:cSld>
   <p:clrMapOvr>
@@ -7104,6 +7248,78 @@
           </a:p>
         </p:txBody>
       </p:sp>
+      <p:pic>
+        <p:nvPicPr>
+          <p:cNvPr id="24" name="Image 0" descr="dog">    </p:cNvPr>
+          <p:cNvPicPr>
+            <a:picLocks noChangeAspect="1"/>
+          </p:cNvPicPr>
+          <p:nvPr/>
+        </p:nvPicPr>
+        <p:blipFill>
+          <a:blip r:embed="rId1"/>
+          <a:stretch>
+            <a:fillRect/>
+          </a:stretch>
+        </p:blipFill>
+        <p:spPr>
+          <a:xfrm>
+            <a:off x="91440" y="3566160"/>
+            <a:ext cx="1425778" cy="1508760"/>
+          </a:xfrm>
+          <a:prstGeom prst="rect">
+            <a:avLst/>
+          </a:prstGeom>
+        </p:spPr>
+      </p:pic>
+      <p:pic>
+        <p:nvPicPr>
+          <p:cNvPr id="25" name="Image 1" descr="bird">    </p:cNvPr>
+          <p:cNvPicPr>
+            <a:picLocks noChangeAspect="1"/>
+          </p:cNvPicPr>
+          <p:nvPr/>
+        </p:nvPicPr>
+        <p:blipFill>
+          <a:blip r:embed="rId2"/>
+          <a:stretch>
+            <a:fillRect/>
+          </a:stretch>
+        </p:blipFill>
+        <p:spPr>
+          <a:xfrm>
+            <a:off x="7758227" y="3337560"/>
+            <a:ext cx="1294333" cy="1737360"/>
+          </a:xfrm>
+          <a:prstGeom prst="rect">
+            <a:avLst/>
+          </a:prstGeom>
+        </p:spPr>
+      </p:pic>
+      <p:pic>
+        <p:nvPicPr>
+          <p:cNvPr id="26" name="Image 2" descr="bird2">    </p:cNvPr>
+          <p:cNvPicPr>
+            <a:picLocks noChangeAspect="1"/>
+          </p:cNvPicPr>
+          <p:nvPr/>
+        </p:nvPicPr>
+        <p:blipFill>
+          <a:blip r:embed="rId3"/>
+          <a:stretch>
+            <a:fillRect/>
+          </a:stretch>
+        </p:blipFill>
+        <p:spPr>
+          <a:xfrm>
+            <a:off x="1920240" y="45720"/>
+            <a:ext cx="918789" cy="731520"/>
+          </a:xfrm>
+          <a:prstGeom prst="rect">
+            <a:avLst/>
+          </a:prstGeom>
+        </p:spPr>
+      </p:pic>
     </p:spTree>
   </p:cSld>
   <p:clrMapOvr>
@@ -8391,6 +8607,54 @@
           </a:p>
         </p:txBody>
       </p:sp>
+      <p:pic>
+        <p:nvPicPr>
+          <p:cNvPr id="25" name="Image 0" descr="cat">    </p:cNvPr>
+          <p:cNvPicPr>
+            <a:picLocks noChangeAspect="1"/>
+          </p:cNvPicPr>
+          <p:nvPr/>
+        </p:nvPicPr>
+        <p:blipFill>
+          <a:blip r:embed="rId1"/>
+          <a:stretch>
+            <a:fillRect/>
+          </a:stretch>
+        </p:blipFill>
+        <p:spPr>
+          <a:xfrm>
+            <a:off x="91440" y="3794760"/>
+            <a:ext cx="1089416" cy="1280160"/>
+          </a:xfrm>
+          <a:prstGeom prst="rect">
+            <a:avLst/>
+          </a:prstGeom>
+        </p:spPr>
+      </p:pic>
+      <p:pic>
+        <p:nvPicPr>
+          <p:cNvPr id="26" name="Image 1" descr="butterfly1">    </p:cNvPr>
+          <p:cNvPicPr>
+            <a:picLocks noChangeAspect="1"/>
+          </p:cNvPicPr>
+          <p:nvPr/>
+        </p:nvPicPr>
+        <p:blipFill>
+          <a:blip r:embed="rId2"/>
+          <a:stretch>
+            <a:fillRect/>
+          </a:stretch>
+        </p:blipFill>
+        <p:spPr>
+          <a:xfrm>
+            <a:off x="5403098" y="45720"/>
+            <a:ext cx="906262" cy="777240"/>
+          </a:xfrm>
+          <a:prstGeom prst="rect">
+            <a:avLst/>
+          </a:prstGeom>
+        </p:spPr>
+      </p:pic>
     </p:spTree>
   </p:cSld>
   <p:clrMapOvr>
@@ -9703,6 +9967,54 @@
           </a:p>
         </p:txBody>
       </p:sp>
+      <p:pic>
+        <p:nvPicPr>
+          <p:cNvPr id="26" name="Image 0" descr="bird">    </p:cNvPr>
+          <p:cNvPicPr>
+            <a:picLocks noChangeAspect="1"/>
+          </p:cNvPicPr>
+          <p:nvPr/>
+        </p:nvPicPr>
+        <p:blipFill>
+          <a:blip r:embed="rId1"/>
+          <a:stretch>
+            <a:fillRect/>
+          </a:stretch>
+        </p:blipFill>
+        <p:spPr>
+          <a:xfrm>
+            <a:off x="91440" y="3566160"/>
+            <a:ext cx="1338270" cy="1508760"/>
+          </a:xfrm>
+          <a:prstGeom prst="rect">
+            <a:avLst/>
+          </a:prstGeom>
+        </p:spPr>
+      </p:pic>
+      <p:pic>
+        <p:nvPicPr>
+          <p:cNvPr id="27" name="Image 1" descr="elephant">    </p:cNvPr>
+          <p:cNvPicPr>
+            <a:picLocks noChangeAspect="1"/>
+          </p:cNvPicPr>
+          <p:nvPr/>
+        </p:nvPicPr>
+        <p:blipFill>
+          <a:blip r:embed="rId2"/>
+          <a:stretch>
+            <a:fillRect/>
+          </a:stretch>
+        </p:blipFill>
+        <p:spPr>
+          <a:xfrm>
+            <a:off x="7113666" y="3337560"/>
+            <a:ext cx="1938894" cy="1737360"/>
+          </a:xfrm>
+          <a:prstGeom prst="rect">
+            <a:avLst/>
+          </a:prstGeom>
+        </p:spPr>
+      </p:pic>
     </p:spTree>
   </p:cSld>
   <p:clrMapOvr>
@@ -10975,6 +11287,78 @@
           </a:p>
         </p:txBody>
       </p:sp>
+      <p:pic>
+        <p:nvPicPr>
+          <p:cNvPr id="24" name="Image 0" descr="turtle">    </p:cNvPr>
+          <p:cNvPicPr>
+            <a:picLocks noChangeAspect="1"/>
+          </p:cNvPicPr>
+          <p:nvPr/>
+        </p:nvPicPr>
+        <p:blipFill>
+          <a:blip r:embed="rId1"/>
+          <a:stretch>
+            <a:fillRect/>
+          </a:stretch>
+        </p:blipFill>
+        <p:spPr>
+          <a:xfrm>
+            <a:off x="91440" y="3566160"/>
+            <a:ext cx="1546479" cy="1508760"/>
+          </a:xfrm>
+          <a:prstGeom prst="rect">
+            <a:avLst/>
+          </a:prstGeom>
+        </p:spPr>
+      </p:pic>
+      <p:pic>
+        <p:nvPicPr>
+          <p:cNvPr id="25" name="Image 1" descr="elephant">    </p:cNvPr>
+          <p:cNvPicPr>
+            <a:picLocks noChangeAspect="1"/>
+          </p:cNvPicPr>
+          <p:nvPr/>
+        </p:nvPicPr>
+        <p:blipFill>
+          <a:blip r:embed="rId2"/>
+          <a:stretch>
+            <a:fillRect/>
+          </a:stretch>
+        </p:blipFill>
+        <p:spPr>
+          <a:xfrm>
+            <a:off x="7012899" y="3337560"/>
+            <a:ext cx="2039661" cy="1737360"/>
+          </a:xfrm>
+          <a:prstGeom prst="rect">
+            <a:avLst/>
+          </a:prstGeom>
+        </p:spPr>
+      </p:pic>
+      <p:pic>
+        <p:nvPicPr>
+          <p:cNvPr id="26" name="Image 2" descr="bird4">    </p:cNvPr>
+          <p:cNvPicPr>
+            <a:picLocks noChangeAspect="1"/>
+          </p:cNvPicPr>
+          <p:nvPr/>
+        </p:nvPicPr>
+        <p:blipFill>
+          <a:blip r:embed="rId3"/>
+          <a:stretch>
+            <a:fillRect/>
+          </a:stretch>
+        </p:blipFill>
+        <p:spPr>
+          <a:xfrm flipH="1">
+            <a:off x="6216457" y="45720"/>
+            <a:ext cx="1007303" cy="777240"/>
+          </a:xfrm>
+          <a:prstGeom prst="rect">
+            <a:avLst/>
+          </a:prstGeom>
+        </p:spPr>
+      </p:pic>
     </p:spTree>
   </p:cSld>
   <p:clrMapOvr>
@@ -12309,6 +12693,30 @@
           </a:p>
         </p:txBody>
       </p:sp>
+      <p:pic>
+        <p:nvPicPr>
+          <p:cNvPr id="28" name="Image 0" descr="bee">    </p:cNvPr>
+          <p:cNvPicPr>
+            <a:picLocks noChangeAspect="1"/>
+          </p:cNvPicPr>
+          <p:nvPr/>
+        </p:nvPicPr>
+        <p:blipFill>
+          <a:blip r:embed="rId1"/>
+          <a:stretch>
+            <a:fillRect/>
+          </a:stretch>
+        </p:blipFill>
+        <p:spPr>
+          <a:xfrm>
+            <a:off x="1005840" y="45720"/>
+            <a:ext cx="802112" cy="777240"/>
+          </a:xfrm>
+          <a:prstGeom prst="rect">
+            <a:avLst/>
+          </a:prstGeom>
+        </p:spPr>
+      </p:pic>
     </p:spTree>
   </p:cSld>
   <p:clrMapOvr>
@@ -13408,6 +13816,78 @@
           </a:p>
         </p:txBody>
       </p:sp>
+      <p:pic>
+        <p:nvPicPr>
+          <p:cNvPr id="25" name="Image 0" descr="fish">    </p:cNvPr>
+          <p:cNvPicPr>
+            <a:picLocks noChangeAspect="1"/>
+          </p:cNvPicPr>
+          <p:nvPr/>
+        </p:nvPicPr>
+        <p:blipFill>
+          <a:blip r:embed="rId1"/>
+          <a:stretch>
+            <a:fillRect/>
+          </a:stretch>
+        </p:blipFill>
+        <p:spPr>
+          <a:xfrm>
+            <a:off x="91440" y="4343400"/>
+            <a:ext cx="909279" cy="731520"/>
+          </a:xfrm>
+          <a:prstGeom prst="rect">
+            <a:avLst/>
+          </a:prstGeom>
+        </p:spPr>
+      </p:pic>
+      <p:pic>
+        <p:nvPicPr>
+          <p:cNvPr id="26" name="Image 1" descr="bird">    </p:cNvPr>
+          <p:cNvPicPr>
+            <a:picLocks noChangeAspect="1"/>
+          </p:cNvPicPr>
+          <p:nvPr/>
+        </p:nvPicPr>
+        <p:blipFill>
+          <a:blip r:embed="rId2"/>
+          <a:stretch>
+            <a:fillRect/>
+          </a:stretch>
+        </p:blipFill>
+        <p:spPr>
+          <a:xfrm>
+            <a:off x="8480511" y="4343400"/>
+            <a:ext cx="572049" cy="731520"/>
+          </a:xfrm>
+          <a:prstGeom prst="rect">
+            <a:avLst/>
+          </a:prstGeom>
+        </p:spPr>
+      </p:pic>
+      <p:pic>
+        <p:nvPicPr>
+          <p:cNvPr id="27" name="Image 2" descr="bird2">    </p:cNvPr>
+          <p:cNvPicPr>
+            <a:picLocks noChangeAspect="1"/>
+          </p:cNvPicPr>
+          <p:nvPr/>
+        </p:nvPicPr>
+        <p:blipFill>
+          <a:blip r:embed="rId3"/>
+          <a:stretch>
+            <a:fillRect/>
+          </a:stretch>
+        </p:blipFill>
+        <p:spPr>
+          <a:xfrm flipH="1">
+            <a:off x="5505420" y="45720"/>
+            <a:ext cx="803940" cy="640080"/>
+          </a:xfrm>
+          <a:prstGeom prst="rect">
+            <a:avLst/>
+          </a:prstGeom>
+        </p:spPr>
+      </p:pic>
     </p:spTree>
   </p:cSld>
   <p:clrMapOvr>
@@ -14380,6 +14860,78 @@
           </a:p>
         </p:txBody>
       </p:sp>
+      <p:pic>
+        <p:nvPicPr>
+          <p:cNvPr id="20" name="Image 0" descr="elephant">    </p:cNvPr>
+          <p:cNvPicPr>
+            <a:picLocks noChangeAspect="1"/>
+          </p:cNvPicPr>
+          <p:nvPr/>
+        </p:nvPicPr>
+        <p:blipFill>
+          <a:blip r:embed="rId1"/>
+          <a:stretch>
+            <a:fillRect/>
+          </a:stretch>
+        </p:blipFill>
+        <p:spPr>
+          <a:xfrm>
+            <a:off x="91440" y="3657600"/>
+            <a:ext cx="1561887" cy="1417320"/>
+          </a:xfrm>
+          <a:prstGeom prst="rect">
+            <a:avLst/>
+          </a:prstGeom>
+        </p:spPr>
+      </p:pic>
+      <p:pic>
+        <p:nvPicPr>
+          <p:cNvPr id="21" name="Image 1" descr="bird">    </p:cNvPr>
+          <p:cNvPicPr>
+            <a:picLocks noChangeAspect="1"/>
+          </p:cNvPicPr>
+          <p:nvPr/>
+        </p:nvPicPr>
+        <p:blipFill>
+          <a:blip r:embed="rId2"/>
+          <a:stretch>
+            <a:fillRect/>
+          </a:stretch>
+        </p:blipFill>
+        <p:spPr>
+          <a:xfrm>
+            <a:off x="7986187" y="3520440"/>
+            <a:ext cx="1066373" cy="1554480"/>
+          </a:xfrm>
+          <a:prstGeom prst="rect">
+            <a:avLst/>
+          </a:prstGeom>
+        </p:spPr>
+      </p:pic>
+      <p:pic>
+        <p:nvPicPr>
+          <p:cNvPr id="22" name="Image 2" descr="butterfly1">    </p:cNvPr>
+          <p:cNvPicPr>
+            <a:picLocks noChangeAspect="1"/>
+          </p:cNvPicPr>
+          <p:nvPr/>
+        </p:nvPicPr>
+        <p:blipFill>
+          <a:blip r:embed="rId3"/>
+          <a:stretch>
+            <a:fillRect/>
+          </a:stretch>
+        </p:blipFill>
+        <p:spPr>
+          <a:xfrm>
+            <a:off x="1920240" y="45720"/>
+            <a:ext cx="906262" cy="777240"/>
+          </a:xfrm>
+          <a:prstGeom prst="rect">
+            <a:avLst/>
+          </a:prstGeom>
+        </p:spPr>
+      </p:pic>
     </p:spTree>
   </p:cSld>
   <p:clrMapOvr>
@@ -15377,6 +15929,78 @@
           </a:p>
         </p:txBody>
       </p:sp>
+      <p:pic>
+        <p:nvPicPr>
+          <p:cNvPr id="21" name="Image 0" descr="duck">    </p:cNvPr>
+          <p:cNvPicPr>
+            <a:picLocks noChangeAspect="1"/>
+          </p:cNvPicPr>
+          <p:nvPr/>
+        </p:nvPicPr>
+        <p:blipFill>
+          <a:blip r:embed="rId1"/>
+          <a:stretch>
+            <a:fillRect/>
+          </a:stretch>
+        </p:blipFill>
+        <p:spPr>
+          <a:xfrm>
+            <a:off x="91440" y="3794760"/>
+            <a:ext cx="1081735" cy="1280160"/>
+          </a:xfrm>
+          <a:prstGeom prst="rect">
+            <a:avLst/>
+          </a:prstGeom>
+        </p:spPr>
+      </p:pic>
+      <p:pic>
+        <p:nvPicPr>
+          <p:cNvPr id="22" name="Image 1" descr="bird">    </p:cNvPr>
+          <p:cNvPicPr>
+            <a:picLocks noChangeAspect="1"/>
+          </p:cNvPicPr>
+          <p:nvPr/>
+        </p:nvPicPr>
+        <p:blipFill>
+          <a:blip r:embed="rId2"/>
+          <a:stretch>
+            <a:fillRect/>
+          </a:stretch>
+        </p:blipFill>
+        <p:spPr>
+          <a:xfrm>
+            <a:off x="8349752" y="4251960"/>
+            <a:ext cx="702808" cy="822960"/>
+          </a:xfrm>
+          <a:prstGeom prst="rect">
+            <a:avLst/>
+          </a:prstGeom>
+        </p:spPr>
+      </p:pic>
+      <p:pic>
+        <p:nvPicPr>
+          <p:cNvPr id="23" name="Image 2" descr="bird1">    </p:cNvPr>
+          <p:cNvPicPr>
+            <a:picLocks noChangeAspect="1"/>
+          </p:cNvPicPr>
+          <p:nvPr/>
+        </p:nvPicPr>
+        <p:blipFill>
+          <a:blip r:embed="rId3"/>
+          <a:stretch>
+            <a:fillRect/>
+          </a:stretch>
+        </p:blipFill>
+        <p:spPr>
+          <a:xfrm flipH="1">
+            <a:off x="5302057" y="45720"/>
+            <a:ext cx="1007303" cy="777240"/>
+          </a:xfrm>
+          <a:prstGeom prst="rect">
+            <a:avLst/>
+          </a:prstGeom>
+        </p:spPr>
+      </p:pic>
     </p:spTree>
   </p:cSld>
   <p:clrMapOvr>
@@ -16399,6 +17023,54 @@
           </a:p>
         </p:txBody>
       </p:sp>
+      <p:pic>
+        <p:nvPicPr>
+          <p:cNvPr id="22" name="Image 0" descr="elephant">    </p:cNvPr>
+          <p:cNvPicPr>
+            <a:picLocks noChangeAspect="1"/>
+          </p:cNvPicPr>
+          <p:nvPr/>
+        </p:nvPicPr>
+        <p:blipFill>
+          <a:blip r:embed="rId1"/>
+          <a:stretch>
+            <a:fillRect/>
+          </a:stretch>
+        </p:blipFill>
+        <p:spPr>
+          <a:xfrm>
+            <a:off x="91440" y="3657600"/>
+            <a:ext cx="1561887" cy="1417320"/>
+          </a:xfrm>
+          <a:prstGeom prst="rect">
+            <a:avLst/>
+          </a:prstGeom>
+        </p:spPr>
+      </p:pic>
+      <p:pic>
+        <p:nvPicPr>
+          <p:cNvPr id="23" name="Image 1" descr="bird">    </p:cNvPr>
+          <p:cNvPicPr>
+            <a:picLocks noChangeAspect="1"/>
+          </p:cNvPicPr>
+          <p:nvPr/>
+        </p:nvPicPr>
+        <p:blipFill>
+          <a:blip r:embed="rId2"/>
+          <a:stretch>
+            <a:fillRect/>
+          </a:stretch>
+        </p:blipFill>
+        <p:spPr>
+          <a:xfrm>
+            <a:off x="7986187" y="3520440"/>
+            <a:ext cx="1066373" cy="1554480"/>
+          </a:xfrm>
+          <a:prstGeom prst="rect">
+            <a:avLst/>
+          </a:prstGeom>
+        </p:spPr>
+      </p:pic>
     </p:spTree>
   </p:cSld>
   <p:clrMapOvr>
@@ -17421,6 +18093,54 @@
           </a:p>
         </p:txBody>
       </p:sp>
+      <p:pic>
+        <p:nvPicPr>
+          <p:cNvPr id="22" name="Image 0" descr="dog">    </p:cNvPr>
+          <p:cNvPicPr>
+            <a:picLocks noChangeAspect="1"/>
+          </p:cNvPicPr>
+          <p:nvPr/>
+        </p:nvPicPr>
+        <p:blipFill>
+          <a:blip r:embed="rId1"/>
+          <a:stretch>
+            <a:fillRect/>
+          </a:stretch>
+        </p:blipFill>
+        <p:spPr>
+          <a:xfrm>
+            <a:off x="91440" y="3657600"/>
+            <a:ext cx="1339367" cy="1417320"/>
+          </a:xfrm>
+          <a:prstGeom prst="rect">
+            <a:avLst/>
+          </a:prstGeom>
+        </p:spPr>
+      </p:pic>
+      <p:pic>
+        <p:nvPicPr>
+          <p:cNvPr id="23" name="Image 1" descr="bird">    </p:cNvPr>
+          <p:cNvPicPr>
+            <a:picLocks noChangeAspect="1"/>
+          </p:cNvPicPr>
+          <p:nvPr/>
+        </p:nvPicPr>
+        <p:blipFill>
+          <a:blip r:embed="rId2"/>
+          <a:stretch>
+            <a:fillRect/>
+          </a:stretch>
+        </p:blipFill>
+        <p:spPr>
+          <a:xfrm>
+            <a:off x="7894472" y="3520440"/>
+            <a:ext cx="1158088" cy="1554480"/>
+          </a:xfrm>
+          <a:prstGeom prst="rect">
+            <a:avLst/>
+          </a:prstGeom>
+        </p:spPr>
+      </p:pic>
     </p:spTree>
   </p:cSld>
   <p:clrMapOvr>
@@ -18403,6 +19123,78 @@
           </a:p>
         </p:txBody>
       </p:sp>
+      <p:pic>
+        <p:nvPicPr>
+          <p:cNvPr id="20" name="Image 0" descr="cat">    </p:cNvPr>
+          <p:cNvPicPr>
+            <a:picLocks noChangeAspect="1"/>
+          </p:cNvPicPr>
+          <p:nvPr/>
+        </p:nvPicPr>
+        <p:blipFill>
+          <a:blip r:embed="rId1"/>
+          <a:stretch>
+            <a:fillRect/>
+          </a:stretch>
+        </p:blipFill>
+        <p:spPr>
+          <a:xfrm>
+            <a:off x="91440" y="3657600"/>
+            <a:ext cx="1206139" cy="1417320"/>
+          </a:xfrm>
+          <a:prstGeom prst="rect">
+            <a:avLst/>
+          </a:prstGeom>
+        </p:spPr>
+      </p:pic>
+      <p:pic>
+        <p:nvPicPr>
+          <p:cNvPr id="21" name="Image 1" descr="elephant">    </p:cNvPr>
+          <p:cNvPicPr>
+            <a:picLocks noChangeAspect="1"/>
+          </p:cNvPicPr>
+          <p:nvPr/>
+        </p:nvPicPr>
+        <p:blipFill>
+          <a:blip r:embed="rId2"/>
+          <a:stretch>
+            <a:fillRect/>
+          </a:stretch>
+        </p:blipFill>
+        <p:spPr>
+          <a:xfrm>
+            <a:off x="7493417" y="3520440"/>
+            <a:ext cx="1559143" cy="1554480"/>
+          </a:xfrm>
+          <a:prstGeom prst="rect">
+            <a:avLst/>
+          </a:prstGeom>
+        </p:spPr>
+      </p:pic>
+      <p:pic>
+        <p:nvPicPr>
+          <p:cNvPr id="22" name="Image 2" descr="bee">    </p:cNvPr>
+          <p:cNvPicPr>
+            <a:picLocks noChangeAspect="1"/>
+          </p:cNvPicPr>
+          <p:nvPr/>
+        </p:nvPicPr>
+        <p:blipFill>
+          <a:blip r:embed="rId3"/>
+          <a:stretch>
+            <a:fillRect/>
+          </a:stretch>
+        </p:blipFill>
+        <p:spPr>
+          <a:xfrm>
+            <a:off x="6421648" y="45720"/>
+            <a:ext cx="802112" cy="777240"/>
+          </a:xfrm>
+          <a:prstGeom prst="rect">
+            <a:avLst/>
+          </a:prstGeom>
+        </p:spPr>
+      </p:pic>
     </p:spTree>
   </p:cSld>
   <p:clrMapOvr>
@@ -19575,6 +20367,30 @@
           </a:p>
         </p:txBody>
       </p:sp>
+      <p:pic>
+        <p:nvPicPr>
+          <p:cNvPr id="28" name="Image 0" descr="bird2">    </p:cNvPr>
+          <p:cNvPicPr>
+            <a:picLocks noChangeAspect="1"/>
+          </p:cNvPicPr>
+          <p:nvPr/>
+        </p:nvPicPr>
+        <p:blipFill>
+          <a:blip r:embed="rId1"/>
+          <a:stretch>
+            <a:fillRect/>
+          </a:stretch>
+        </p:blipFill>
+        <p:spPr>
+          <a:xfrm>
+            <a:off x="1005840" y="45720"/>
+            <a:ext cx="976213" cy="777240"/>
+          </a:xfrm>
+          <a:prstGeom prst="rect">
+            <a:avLst/>
+          </a:prstGeom>
+        </p:spPr>
+      </p:pic>
     </p:spTree>
   </p:cSld>
   <p:clrMapOvr>
@@ -20575,6 +21391,78 @@
           </a:p>
         </p:txBody>
       </p:sp>
+      <p:pic>
+        <p:nvPicPr>
+          <p:cNvPr id="22" name="Image 0" descr="turtle">    </p:cNvPr>
+          <p:cNvPicPr>
+            <a:picLocks noChangeAspect="1"/>
+          </p:cNvPicPr>
+          <p:nvPr/>
+        </p:nvPicPr>
+        <p:blipFill>
+          <a:blip r:embed="rId1"/>
+          <a:stretch>
+            <a:fillRect/>
+          </a:stretch>
+        </p:blipFill>
+        <p:spPr>
+          <a:xfrm>
+            <a:off x="91440" y="1783080"/>
+            <a:ext cx="1593342" cy="1554480"/>
+          </a:xfrm>
+          <a:prstGeom prst="rect">
+            <a:avLst/>
+          </a:prstGeom>
+        </p:spPr>
+      </p:pic>
+      <p:pic>
+        <p:nvPicPr>
+          <p:cNvPr id="23" name="Image 1" descr="elephant">    </p:cNvPr>
+          <p:cNvPicPr>
+            <a:picLocks noChangeAspect="1"/>
+          </p:cNvPicPr>
+          <p:nvPr/>
+        </p:nvPicPr>
+        <p:blipFill>
+          <a:blip r:embed="rId2"/>
+          <a:stretch>
+            <a:fillRect/>
+          </a:stretch>
+        </p:blipFill>
+        <p:spPr>
+          <a:xfrm>
+            <a:off x="7227600" y="1783080"/>
+            <a:ext cx="1824960" cy="1554480"/>
+          </a:xfrm>
+          <a:prstGeom prst="rect">
+            <a:avLst/>
+          </a:prstGeom>
+        </p:spPr>
+      </p:pic>
+      <p:pic>
+        <p:nvPicPr>
+          <p:cNvPr id="24" name="Image 2" descr="butterfly1">    </p:cNvPr>
+          <p:cNvPicPr>
+            <a:picLocks noChangeAspect="1"/>
+          </p:cNvPicPr>
+          <p:nvPr/>
+        </p:nvPicPr>
+        <p:blipFill>
+          <a:blip r:embed="rId3"/>
+          <a:stretch>
+            <a:fillRect/>
+          </a:stretch>
+        </p:blipFill>
+        <p:spPr>
+          <a:xfrm>
+            <a:off x="5456408" y="45720"/>
+            <a:ext cx="852952" cy="731520"/>
+          </a:xfrm>
+          <a:prstGeom prst="rect">
+            <a:avLst/>
+          </a:prstGeom>
+        </p:spPr>
+      </p:pic>
     </p:spTree>
   </p:cSld>
   <p:clrMapOvr>
@@ -21376,6 +22264,78 @@
           </a:p>
         </p:txBody>
       </p:sp>
+      <p:pic>
+        <p:nvPicPr>
+          <p:cNvPr id="17" name="Image 0" descr="rabbit">    </p:cNvPr>
+          <p:cNvPicPr>
+            <a:picLocks noChangeAspect="1"/>
+          </p:cNvPicPr>
+          <p:nvPr/>
+        </p:nvPicPr>
+        <p:blipFill>
+          <a:blip r:embed="rId1"/>
+          <a:stretch>
+            <a:fillRect/>
+          </a:stretch>
+        </p:blipFill>
+        <p:spPr>
+          <a:xfrm>
+            <a:off x="91440" y="1783080"/>
+            <a:ext cx="1162751" cy="1554480"/>
+          </a:xfrm>
+          <a:prstGeom prst="rect">
+            <a:avLst/>
+          </a:prstGeom>
+        </p:spPr>
+      </p:pic>
+      <p:pic>
+        <p:nvPicPr>
+          <p:cNvPr id="18" name="Image 1" descr="elephant">    </p:cNvPr>
+          <p:cNvPicPr>
+            <a:picLocks noChangeAspect="1"/>
+          </p:cNvPicPr>
+          <p:nvPr/>
+        </p:nvPicPr>
+        <p:blipFill>
+          <a:blip r:embed="rId2"/>
+          <a:stretch>
+            <a:fillRect/>
+          </a:stretch>
+        </p:blipFill>
+        <p:spPr>
+          <a:xfrm>
+            <a:off x="7299107" y="1783080"/>
+            <a:ext cx="1753453" cy="1554480"/>
+          </a:xfrm>
+          <a:prstGeom prst="rect">
+            <a:avLst/>
+          </a:prstGeom>
+        </p:spPr>
+      </p:pic>
+      <p:pic>
+        <p:nvPicPr>
+          <p:cNvPr id="19" name="Image 2" descr="bird1">    </p:cNvPr>
+          <p:cNvPicPr>
+            <a:picLocks noChangeAspect="1"/>
+          </p:cNvPicPr>
+          <p:nvPr/>
+        </p:nvPicPr>
+        <p:blipFill>
+          <a:blip r:embed="rId3"/>
+          <a:stretch>
+            <a:fillRect/>
+          </a:stretch>
+        </p:blipFill>
+        <p:spPr>
+          <a:xfrm>
+            <a:off x="1920240" y="45720"/>
+            <a:ext cx="888797" cy="685800"/>
+          </a:xfrm>
+          <a:prstGeom prst="rect">
+            <a:avLst/>
+          </a:prstGeom>
+        </p:spPr>
+      </p:pic>
     </p:spTree>
   </p:cSld>
   <p:clrMapOvr>
@@ -22202,6 +23162,78 @@
           </a:p>
         </p:txBody>
       </p:sp>
+      <p:pic>
+        <p:nvPicPr>
+          <p:cNvPr id="18" name="Image 0" descr="fish">    </p:cNvPr>
+          <p:cNvPicPr>
+            <a:picLocks noChangeAspect="1"/>
+          </p:cNvPicPr>
+          <p:nvPr/>
+        </p:nvPicPr>
+        <p:blipFill>
+          <a:blip r:embed="rId1"/>
+          <a:stretch>
+            <a:fillRect/>
+          </a:stretch>
+        </p:blipFill>
+        <p:spPr>
+          <a:xfrm>
+            <a:off x="91440" y="1783080"/>
+            <a:ext cx="1932219" cy="1554480"/>
+          </a:xfrm>
+          <a:prstGeom prst="rect">
+            <a:avLst/>
+          </a:prstGeom>
+        </p:spPr>
+      </p:pic>
+      <p:pic>
+        <p:nvPicPr>
+          <p:cNvPr id="19" name="Image 1" descr="bird">    </p:cNvPr>
+          <p:cNvPicPr>
+            <a:picLocks noChangeAspect="1"/>
+          </p:cNvPicPr>
+          <p:nvPr/>
+        </p:nvPicPr>
+        <p:blipFill>
+          <a:blip r:embed="rId2"/>
+          <a:stretch>
+            <a:fillRect/>
+          </a:stretch>
+        </p:blipFill>
+        <p:spPr>
+          <a:xfrm>
+            <a:off x="7836957" y="1783080"/>
+            <a:ext cx="1215603" cy="1554480"/>
+          </a:xfrm>
+          <a:prstGeom prst="rect">
+            <a:avLst/>
+          </a:prstGeom>
+        </p:spPr>
+      </p:pic>
+      <p:pic>
+        <p:nvPicPr>
+          <p:cNvPr id="20" name="Image 2" descr="bird4">    </p:cNvPr>
+          <p:cNvPicPr>
+            <a:picLocks noChangeAspect="1"/>
+          </p:cNvPicPr>
+          <p:nvPr/>
+        </p:nvPicPr>
+        <p:blipFill>
+          <a:blip r:embed="rId3"/>
+          <a:stretch>
+            <a:fillRect/>
+          </a:stretch>
+        </p:blipFill>
+        <p:spPr>
+          <a:xfrm flipH="1">
+            <a:off x="5302057" y="45720"/>
+            <a:ext cx="1007303" cy="777240"/>
+          </a:xfrm>
+          <a:prstGeom prst="rect">
+            <a:avLst/>
+          </a:prstGeom>
+        </p:spPr>
+      </p:pic>
     </p:spTree>
   </p:cSld>
   <p:clrMapOvr>
@@ -23053,6 +24085,54 @@
           </a:p>
         </p:txBody>
       </p:sp>
+      <p:pic>
+        <p:nvPicPr>
+          <p:cNvPr id="19" name="Image 0" descr="elephant">    </p:cNvPr>
+          <p:cNvPicPr>
+            <a:picLocks noChangeAspect="1"/>
+          </p:cNvPicPr>
+          <p:nvPr/>
+        </p:nvPicPr>
+        <p:blipFill>
+          <a:blip r:embed="rId1"/>
+          <a:stretch>
+            <a:fillRect/>
+          </a:stretch>
+        </p:blipFill>
+        <p:spPr>
+          <a:xfrm>
+            <a:off x="91440" y="1783080"/>
+            <a:ext cx="1713037" cy="1554480"/>
+          </a:xfrm>
+          <a:prstGeom prst="rect">
+            <a:avLst/>
+          </a:prstGeom>
+        </p:spPr>
+      </p:pic>
+      <p:pic>
+        <p:nvPicPr>
+          <p:cNvPr id="20" name="Image 1" descr="bird">    </p:cNvPr>
+          <p:cNvPicPr>
+            <a:picLocks noChangeAspect="1"/>
+          </p:cNvPicPr>
+          <p:nvPr/>
+        </p:nvPicPr>
+        <p:blipFill>
+          <a:blip r:embed="rId2"/>
+          <a:stretch>
+            <a:fillRect/>
+          </a:stretch>
+        </p:blipFill>
+        <p:spPr>
+          <a:xfrm>
+            <a:off x="7986187" y="1783080"/>
+            <a:ext cx="1066373" cy="1554480"/>
+          </a:xfrm>
+          <a:prstGeom prst="rect">
+            <a:avLst/>
+          </a:prstGeom>
+        </p:spPr>
+      </p:pic>
     </p:spTree>
   </p:cSld>
   <p:clrMapOvr>
@@ -23963,6 +25043,78 @@
           </a:p>
         </p:txBody>
       </p:sp>
+      <p:pic>
+        <p:nvPicPr>
+          <p:cNvPr id="20" name="Image 0" descr="duck">    </p:cNvPr>
+          <p:cNvPicPr>
+            <a:picLocks noChangeAspect="1"/>
+          </p:cNvPicPr>
+          <p:nvPr/>
+        </p:nvPicPr>
+        <p:blipFill>
+          <a:blip r:embed="rId1"/>
+          <a:stretch>
+            <a:fillRect/>
+          </a:stretch>
+        </p:blipFill>
+        <p:spPr>
+          <a:xfrm>
+            <a:off x="91440" y="3657600"/>
+            <a:ext cx="1197635" cy="1417320"/>
+          </a:xfrm>
+          <a:prstGeom prst="rect">
+            <a:avLst/>
+          </a:prstGeom>
+        </p:spPr>
+      </p:pic>
+      <p:pic>
+        <p:nvPicPr>
+          <p:cNvPr id="21" name="Image 1" descr="bird">    </p:cNvPr>
+          <p:cNvPicPr>
+            <a:picLocks noChangeAspect="1"/>
+          </p:cNvPicPr>
+          <p:nvPr/>
+        </p:nvPicPr>
+        <p:blipFill>
+          <a:blip r:embed="rId2"/>
+          <a:stretch>
+            <a:fillRect/>
+          </a:stretch>
+        </p:blipFill>
+        <p:spPr>
+          <a:xfrm>
+            <a:off x="7725034" y="3520440"/>
+            <a:ext cx="1327526" cy="1554480"/>
+          </a:xfrm>
+          <a:prstGeom prst="rect">
+            <a:avLst/>
+          </a:prstGeom>
+        </p:spPr>
+      </p:pic>
+      <p:pic>
+        <p:nvPicPr>
+          <p:cNvPr id="22" name="Image 2" descr="butterfly1">    </p:cNvPr>
+          <p:cNvPicPr>
+            <a:picLocks noChangeAspect="1"/>
+          </p:cNvPicPr>
+          <p:nvPr/>
+        </p:nvPicPr>
+        <p:blipFill>
+          <a:blip r:embed="rId3"/>
+          <a:stretch>
+            <a:fillRect/>
+          </a:stretch>
+        </p:blipFill>
+        <p:spPr>
+          <a:xfrm>
+            <a:off x="6317498" y="45720"/>
+            <a:ext cx="906262" cy="777240"/>
+          </a:xfrm>
+          <a:prstGeom prst="rect">
+            <a:avLst/>
+          </a:prstGeom>
+        </p:spPr>
+      </p:pic>
     </p:spTree>
   </p:cSld>
   <p:clrMapOvr>
@@ -25135,6 +26287,30 @@
           </a:p>
         </p:txBody>
       </p:sp>
+      <p:pic>
+        <p:nvPicPr>
+          <p:cNvPr id="28" name="Image 0" descr="bird1">    </p:cNvPr>
+          <p:cNvPicPr>
+            <a:picLocks noChangeAspect="1"/>
+          </p:cNvPicPr>
+          <p:nvPr/>
+        </p:nvPicPr>
+        <p:blipFill>
+          <a:blip r:embed="rId1"/>
+          <a:stretch>
+            <a:fillRect/>
+          </a:stretch>
+        </p:blipFill>
+        <p:spPr>
+          <a:xfrm>
+            <a:off x="1005840" y="45720"/>
+            <a:ext cx="1007303" cy="777240"/>
+          </a:xfrm>
+          <a:prstGeom prst="rect">
+            <a:avLst/>
+          </a:prstGeom>
+        </p:spPr>
+      </p:pic>
     </p:spTree>
   </p:cSld>
   <p:clrMapOvr>
@@ -26234,6 +27410,54 @@
           </a:p>
         </p:txBody>
       </p:sp>
+      <p:pic>
+        <p:nvPicPr>
+          <p:cNvPr id="25" name="Image 0" descr="cat">    </p:cNvPr>
+          <p:cNvPicPr>
+            <a:picLocks noChangeAspect="1"/>
+          </p:cNvPicPr>
+          <p:nvPr/>
+        </p:nvPicPr>
+        <p:blipFill>
+          <a:blip r:embed="rId1"/>
+          <a:stretch>
+            <a:fillRect/>
+          </a:stretch>
+        </p:blipFill>
+        <p:spPr>
+          <a:xfrm>
+            <a:off x="91440" y="4023360"/>
+            <a:ext cx="894878" cy="1051560"/>
+          </a:xfrm>
+          <a:prstGeom prst="rect">
+            <a:avLst/>
+          </a:prstGeom>
+        </p:spPr>
+      </p:pic>
+      <p:pic>
+        <p:nvPicPr>
+          <p:cNvPr id="26" name="Image 1" descr="bird4">    </p:cNvPr>
+          <p:cNvPicPr>
+            <a:picLocks noChangeAspect="1"/>
+          </p:cNvPicPr>
+          <p:nvPr/>
+        </p:nvPicPr>
+        <p:blipFill>
+          <a:blip r:embed="rId2"/>
+          <a:stretch>
+            <a:fillRect/>
+          </a:stretch>
+        </p:blipFill>
+        <p:spPr>
+          <a:xfrm flipH="1">
+            <a:off x="5479816" y="45720"/>
+            <a:ext cx="829544" cy="640080"/>
+          </a:xfrm>
+          <a:prstGeom prst="rect">
+            <a:avLst/>
+          </a:prstGeom>
+        </p:spPr>
+      </p:pic>
     </p:spTree>
   </p:cSld>
   <p:clrMapOvr>
@@ -27206,6 +28430,78 @@
           </a:p>
         </p:txBody>
       </p:sp>
+      <p:pic>
+        <p:nvPicPr>
+          <p:cNvPr id="20" name="Image 0" descr="bird">    </p:cNvPr>
+          <p:cNvPicPr>
+            <a:picLocks noChangeAspect="1"/>
+          </p:cNvPicPr>
+          <p:nvPr/>
+        </p:nvPicPr>
+        <p:blipFill>
+          <a:blip r:embed="rId1"/>
+          <a:stretch>
+            <a:fillRect/>
+          </a:stretch>
+        </p:blipFill>
+        <p:spPr>
+          <a:xfrm>
+            <a:off x="91440" y="3657600"/>
+            <a:ext cx="1257163" cy="1417320"/>
+          </a:xfrm>
+          <a:prstGeom prst="rect">
+            <a:avLst/>
+          </a:prstGeom>
+        </p:spPr>
+      </p:pic>
+      <p:pic>
+        <p:nvPicPr>
+          <p:cNvPr id="21" name="Image 1" descr="elephant">    </p:cNvPr>
+          <p:cNvPicPr>
+            <a:picLocks noChangeAspect="1"/>
+          </p:cNvPicPr>
+          <p:nvPr/>
+        </p:nvPicPr>
+        <p:blipFill>
+          <a:blip r:embed="rId2"/>
+          <a:stretch>
+            <a:fillRect/>
+          </a:stretch>
+        </p:blipFill>
+        <p:spPr>
+          <a:xfrm>
+            <a:off x="7317760" y="3520440"/>
+            <a:ext cx="1734800" cy="1554480"/>
+          </a:xfrm>
+          <a:prstGeom prst="rect">
+            <a:avLst/>
+          </a:prstGeom>
+        </p:spPr>
+      </p:pic>
+      <p:pic>
+        <p:nvPicPr>
+          <p:cNvPr id="22" name="Image 2" descr="bee">    </p:cNvPr>
+          <p:cNvPicPr>
+            <a:picLocks noChangeAspect="1"/>
+          </p:cNvPicPr>
+          <p:nvPr/>
+        </p:nvPicPr>
+        <p:blipFill>
+          <a:blip r:embed="rId3"/>
+          <a:stretch>
+            <a:fillRect/>
+          </a:stretch>
+        </p:blipFill>
+        <p:spPr>
+          <a:xfrm>
+            <a:off x="1920240" y="45720"/>
+            <a:ext cx="802112" cy="777240"/>
+          </a:xfrm>
+          <a:prstGeom prst="rect">
+            <a:avLst/>
+          </a:prstGeom>
+        </p:spPr>
+      </p:pic>
     </p:spTree>
   </p:cSld>
   <p:clrMapOvr>
@@ -28203,6 +29499,54 @@
           </a:p>
         </p:txBody>
       </p:sp>
+      <p:pic>
+        <p:nvPicPr>
+          <p:cNvPr id="21" name="Image 0" descr="turtle">    </p:cNvPr>
+          <p:cNvPicPr>
+            <a:picLocks noChangeAspect="1"/>
+          </p:cNvPicPr>
+          <p:nvPr/>
+        </p:nvPicPr>
+        <p:blipFill>
+          <a:blip r:embed="rId1"/>
+          <a:stretch>
+            <a:fillRect/>
+          </a:stretch>
+        </p:blipFill>
+        <p:spPr>
+          <a:xfrm>
+            <a:off x="91440" y="4023360"/>
+            <a:ext cx="1077849" cy="1051560"/>
+          </a:xfrm>
+          <a:prstGeom prst="rect">
+            <a:avLst/>
+          </a:prstGeom>
+        </p:spPr>
+      </p:pic>
+      <p:pic>
+        <p:nvPicPr>
+          <p:cNvPr id="22" name="Image 1" descr="bird2">    </p:cNvPr>
+          <p:cNvPicPr>
+            <a:picLocks noChangeAspect="1"/>
+          </p:cNvPicPr>
+          <p:nvPr/>
+        </p:nvPicPr>
+        <p:blipFill>
+          <a:blip r:embed="rId2"/>
+          <a:stretch>
+            <a:fillRect/>
+          </a:stretch>
+        </p:blipFill>
+        <p:spPr>
+          <a:xfrm flipH="1">
+            <a:off x="5333147" y="45720"/>
+            <a:ext cx="976213" cy="777240"/>
+          </a:xfrm>
+          <a:prstGeom prst="rect">
+            <a:avLst/>
+          </a:prstGeom>
+        </p:spPr>
+      </p:pic>
     </p:spTree>
   </p:cSld>
   <p:clrMapOvr>
@@ -29225,6 +30569,54 @@
           </a:p>
         </p:txBody>
       </p:sp>
+      <p:pic>
+        <p:nvPicPr>
+          <p:cNvPr id="22" name="Image 0" descr="rabbit">    </p:cNvPr>
+          <p:cNvPicPr>
+            <a:picLocks noChangeAspect="1"/>
+          </p:cNvPicPr>
+          <p:nvPr/>
+        </p:nvPicPr>
+        <p:blipFill>
+          <a:blip r:embed="rId1"/>
+          <a:stretch>
+            <a:fillRect/>
+          </a:stretch>
+        </p:blipFill>
+        <p:spPr>
+          <a:xfrm>
+            <a:off x="91440" y="3657600"/>
+            <a:ext cx="1060155" cy="1417320"/>
+          </a:xfrm>
+          <a:prstGeom prst="rect">
+            <a:avLst/>
+          </a:prstGeom>
+        </p:spPr>
+      </p:pic>
+      <p:pic>
+        <p:nvPicPr>
+          <p:cNvPr id="23" name="Image 1" descr="elephant">    </p:cNvPr>
+          <p:cNvPicPr>
+            <a:picLocks noChangeAspect="1"/>
+          </p:cNvPicPr>
+          <p:nvPr/>
+        </p:nvPicPr>
+        <p:blipFill>
+          <a:blip r:embed="rId2"/>
+          <a:stretch>
+            <a:fillRect/>
+          </a:stretch>
+        </p:blipFill>
+        <p:spPr>
+          <a:xfrm>
+            <a:off x="7299107" y="3520440"/>
+            <a:ext cx="1753453" cy="1554480"/>
+          </a:xfrm>
+          <a:prstGeom prst="rect">
+            <a:avLst/>
+          </a:prstGeom>
+        </p:spPr>
+      </p:pic>
     </p:spTree>
   </p:cSld>
   <p:clrMapOvr>
@@ -30335,6 +31727,78 @@
           </a:p>
         </p:txBody>
       </p:sp>
+      <p:pic>
+        <p:nvPicPr>
+          <p:cNvPr id="24" name="Image 0" descr="fish">    </p:cNvPr>
+          <p:cNvPicPr>
+            <a:picLocks noChangeAspect="1"/>
+          </p:cNvPicPr>
+          <p:nvPr/>
+        </p:nvPicPr>
+        <p:blipFill>
+          <a:blip r:embed="rId1"/>
+          <a:stretch>
+            <a:fillRect/>
+          </a:stretch>
+        </p:blipFill>
+        <p:spPr>
+          <a:xfrm>
+            <a:off x="91440" y="3566160"/>
+            <a:ext cx="1875389" cy="1508760"/>
+          </a:xfrm>
+          <a:prstGeom prst="rect">
+            <a:avLst/>
+          </a:prstGeom>
+        </p:spPr>
+      </p:pic>
+      <p:pic>
+        <p:nvPicPr>
+          <p:cNvPr id="25" name="Image 1" descr="bird">    </p:cNvPr>
+          <p:cNvPicPr>
+            <a:picLocks noChangeAspect="1"/>
+          </p:cNvPicPr>
+          <p:nvPr/>
+        </p:nvPicPr>
+        <p:blipFill>
+          <a:blip r:embed="rId2"/>
+          <a:stretch>
+            <a:fillRect/>
+          </a:stretch>
+        </p:blipFill>
+        <p:spPr>
+          <a:xfrm>
+            <a:off x="7693944" y="3337560"/>
+            <a:ext cx="1358616" cy="1737360"/>
+          </a:xfrm>
+          <a:prstGeom prst="rect">
+            <a:avLst/>
+          </a:prstGeom>
+        </p:spPr>
+      </p:pic>
+      <p:pic>
+        <p:nvPicPr>
+          <p:cNvPr id="26" name="Image 2" descr="bird1">    </p:cNvPr>
+          <p:cNvPicPr>
+            <a:picLocks noChangeAspect="1"/>
+          </p:cNvPicPr>
+          <p:nvPr/>
+        </p:nvPicPr>
+        <p:blipFill>
+          <a:blip r:embed="rId3"/>
+          <a:stretch>
+            <a:fillRect/>
+          </a:stretch>
+        </p:blipFill>
+        <p:spPr>
+          <a:xfrm flipH="1">
+            <a:off x="6216457" y="45720"/>
+            <a:ext cx="1007303" cy="777240"/>
+          </a:xfrm>
+          <a:prstGeom prst="rect">
+            <a:avLst/>
+          </a:prstGeom>
+        </p:spPr>
+      </p:pic>
     </p:spTree>
   </p:cSld>
   <p:clrMapOvr>

--- a/fathah-plus/01-alif.pptx
+++ b/fathah-plus/01-alif.pptx
@@ -3430,7 +3430,7 @@
       </p:sp>
       <p:pic>
         <p:nvPicPr>
-          <p:cNvPr id="14" name="Image 0" descr="fish">    </p:cNvPr>
+          <p:cNvPr id="14" name="Image 0" descr="deer">    </p:cNvPr>
           <p:cNvPicPr>
             <a:picLocks noChangeAspect="1"/>
           </p:cNvPicPr>
@@ -3443,9 +3443,9 @@
           </a:stretch>
         </p:blipFill>
         <p:spPr>
-          <a:xfrm>
-            <a:off x="91440" y="1783080"/>
-            <a:ext cx="1932219" cy="1554480"/>
+          <a:xfrm flipH="1">
+            <a:off x="91440" y="1828800"/>
+            <a:ext cx="1463040" cy="1463040"/>
           </a:xfrm>
           <a:prstGeom prst="rect">
             <a:avLst/>
@@ -3454,7 +3454,7 @@
       </p:pic>
       <p:pic>
         <p:nvPicPr>
-          <p:cNvPr id="15" name="Image 1" descr="bird">    </p:cNvPr>
+          <p:cNvPr id="15" name="Image 1" descr="elephant">    </p:cNvPr>
           <p:cNvPicPr>
             <a:picLocks noChangeAspect="1"/>
           </p:cNvPicPr>
@@ -3468,8 +3468,8 @@
         </p:blipFill>
         <p:spPr>
           <a:xfrm>
-            <a:off x="7836957" y="1783080"/>
-            <a:ext cx="1215603" cy="1554480"/>
+            <a:off x="7280819" y="1828800"/>
+            <a:ext cx="1771741" cy="1463040"/>
           </a:xfrm>
           <a:prstGeom prst="rect">
             <a:avLst/>
@@ -3478,7 +3478,7 @@
       </p:pic>
       <p:pic>
         <p:nvPicPr>
-          <p:cNvPr id="16" name="Image 2" descr="bee">    </p:cNvPr>
+          <p:cNvPr id="16" name="Image 2" descr="bird">    </p:cNvPr>
           <p:cNvPicPr>
             <a:picLocks noChangeAspect="1"/>
           </p:cNvPicPr>
@@ -3491,9 +3491,9 @@
           </a:stretch>
         </p:blipFill>
         <p:spPr>
-          <a:xfrm>
-            <a:off x="5507248" y="45720"/>
-            <a:ext cx="802112" cy="777240"/>
+          <a:xfrm flipH="1">
+            <a:off x="1920240" y="45720"/>
+            <a:ext cx="742264" cy="777240"/>
           </a:xfrm>
           <a:prstGeom prst="rect">
             <a:avLst/>
@@ -4527,7 +4527,7 @@
       </p:sp>
       <p:pic>
         <p:nvPicPr>
-          <p:cNvPr id="32" name="Image 0" descr="bird4">    </p:cNvPr>
+          <p:cNvPr id="32" name="Image 0" descr="lady_beetle">    </p:cNvPr>
           <p:cNvPicPr>
             <a:picLocks noChangeAspect="1"/>
           </p:cNvPicPr>
@@ -4541,8 +4541,8 @@
         </p:blipFill>
         <p:spPr>
           <a:xfrm>
-            <a:off x="1005840" y="45720"/>
-            <a:ext cx="1007303" cy="777240"/>
+            <a:off x="4797491" y="45720"/>
+            <a:ext cx="780349" cy="777240"/>
           </a:xfrm>
           <a:prstGeom prst="rect">
             <a:avLst/>
@@ -5940,7 +5940,7 @@
       </p:sp>
       <p:pic>
         <p:nvPicPr>
-          <p:cNvPr id="29" name="Image 0" descr="duck">    </p:cNvPr>
+          <p:cNvPr id="29" name="Image 0" descr="bird">    </p:cNvPr>
           <p:cNvPicPr>
             <a:picLocks noChangeAspect="1"/>
           </p:cNvPicPr>
@@ -5953,33 +5953,9 @@
           </a:stretch>
         </p:blipFill>
         <p:spPr>
-          <a:xfrm>
-            <a:off x="91440" y="3977640"/>
-            <a:ext cx="927202" cy="1097280"/>
-          </a:xfrm>
-          <a:prstGeom prst="rect">
-            <a:avLst/>
-          </a:prstGeom>
-        </p:spPr>
-      </p:pic>
-      <p:pic>
-        <p:nvPicPr>
-          <p:cNvPr id="30" name="Image 1" descr="bee">    </p:cNvPr>
-          <p:cNvPicPr>
-            <a:picLocks noChangeAspect="1"/>
-          </p:cNvPicPr>
-          <p:nvPr/>
-        </p:nvPicPr>
-        <p:blipFill>
-          <a:blip r:embed="rId2"/>
-          <a:stretch>
-            <a:fillRect/>
-          </a:stretch>
-        </p:blipFill>
-        <p:spPr>
-          <a:xfrm>
-            <a:off x="5507248" y="45720"/>
-            <a:ext cx="802112" cy="777240"/>
+          <a:xfrm flipH="1">
+            <a:off x="2834640" y="45720"/>
+            <a:ext cx="742264" cy="777240"/>
           </a:xfrm>
           <a:prstGeom prst="rect">
             <a:avLst/>
@@ -7250,7 +7226,7 @@
       </p:sp>
       <p:pic>
         <p:nvPicPr>
-          <p:cNvPr id="24" name="Image 0" descr="dog">    </p:cNvPr>
+          <p:cNvPr id="24" name="Image 0" descr="peacock">    </p:cNvPr>
           <p:cNvPicPr>
             <a:picLocks noChangeAspect="1"/>
           </p:cNvPicPr>
@@ -7264,8 +7240,8 @@
         </p:blipFill>
         <p:spPr>
           <a:xfrm>
-            <a:off x="91440" y="3566160"/>
-            <a:ext cx="1425778" cy="1508760"/>
+            <a:off x="91440" y="3561588"/>
+            <a:ext cx="1609847" cy="1508760"/>
           </a:xfrm>
           <a:prstGeom prst="rect">
             <a:avLst/>
@@ -7274,7 +7250,7 @@
       </p:pic>
       <p:pic>
         <p:nvPicPr>
-          <p:cNvPr id="25" name="Image 1" descr="bird">    </p:cNvPr>
+          <p:cNvPr id="25" name="Image 1" descr="duck">    </p:cNvPr>
           <p:cNvPicPr>
             <a:picLocks noChangeAspect="1"/>
           </p:cNvPicPr>
@@ -7288,8 +7264,8 @@
         </p:blipFill>
         <p:spPr>
           <a:xfrm>
-            <a:off x="7758227" y="3337560"/>
-            <a:ext cx="1294333" cy="1737360"/>
+            <a:off x="7315200" y="3332988"/>
+            <a:ext cx="1737360" cy="1737360"/>
           </a:xfrm>
           <a:prstGeom prst="rect">
             <a:avLst/>
@@ -7298,7 +7274,7 @@
       </p:pic>
       <p:pic>
         <p:nvPicPr>
-          <p:cNvPr id="26" name="Image 2" descr="bird2">    </p:cNvPr>
+          <p:cNvPr id="26" name="Image 2" descr="butterfly">    </p:cNvPr>
           <p:cNvPicPr>
             <a:picLocks noChangeAspect="1"/>
           </p:cNvPicPr>
@@ -7312,8 +7288,8 @@
         </p:blipFill>
         <p:spPr>
           <a:xfrm>
-            <a:off x="1920240" y="45720"/>
-            <a:ext cx="918789" cy="731520"/>
+            <a:off x="5760720" y="45720"/>
+            <a:ext cx="548640" cy="548640"/>
           </a:xfrm>
           <a:prstGeom prst="rect">
             <a:avLst/>
@@ -8609,7 +8585,7 @@
       </p:sp>
       <p:pic>
         <p:nvPicPr>
-          <p:cNvPr id="25" name="Image 0" descr="cat">    </p:cNvPr>
+          <p:cNvPr id="25" name="Image 0" descr="zebra">    </p:cNvPr>
           <p:cNvPicPr>
             <a:picLocks noChangeAspect="1"/>
           </p:cNvPicPr>
@@ -8623,8 +8599,8 @@
         </p:blipFill>
         <p:spPr>
           <a:xfrm>
-            <a:off x="91440" y="3794760"/>
-            <a:ext cx="1089416" cy="1280160"/>
+            <a:off x="91440" y="3973068"/>
+            <a:ext cx="1097280" cy="1097280"/>
           </a:xfrm>
           <a:prstGeom prst="rect">
             <a:avLst/>
@@ -8633,7 +8609,7 @@
       </p:pic>
       <p:pic>
         <p:nvPicPr>
-          <p:cNvPr id="26" name="Image 1" descr="butterfly1">    </p:cNvPr>
+          <p:cNvPr id="26" name="Image 1" descr="snail">    </p:cNvPr>
           <p:cNvPicPr>
             <a:picLocks noChangeAspect="1"/>
           </p:cNvPicPr>
@@ -8646,9 +8622,33 @@
           </a:stretch>
         </p:blipFill>
         <p:spPr>
-          <a:xfrm>
-            <a:off x="5403098" y="45720"/>
-            <a:ext cx="906262" cy="777240"/>
+          <a:xfrm flipH="1">
+            <a:off x="8354416" y="4384548"/>
+            <a:ext cx="698144" cy="685800"/>
+          </a:xfrm>
+          <a:prstGeom prst="rect">
+            <a:avLst/>
+          </a:prstGeom>
+        </p:spPr>
+      </p:pic>
+      <p:pic>
+        <p:nvPicPr>
+          <p:cNvPr id="27" name="Image 2" descr="dove">    </p:cNvPr>
+          <p:cNvPicPr>
+            <a:picLocks noChangeAspect="1"/>
+          </p:cNvPicPr>
+          <p:nvPr/>
+        </p:nvPicPr>
+        <p:blipFill>
+          <a:blip r:embed="rId3"/>
+          <a:stretch>
+            <a:fillRect/>
+          </a:stretch>
+        </p:blipFill>
+        <p:spPr>
+          <a:xfrm flipH="1">
+            <a:off x="1920240" y="45720"/>
+            <a:ext cx="774131" cy="777240"/>
           </a:xfrm>
           <a:prstGeom prst="rect">
             <a:avLst/>
@@ -9969,7 +9969,7 @@
       </p:sp>
       <p:pic>
         <p:nvPicPr>
-          <p:cNvPr id="26" name="Image 0" descr="bird">    </p:cNvPr>
+          <p:cNvPr id="26" name="Image 0" descr="dog">    </p:cNvPr>
           <p:cNvPicPr>
             <a:picLocks noChangeAspect="1"/>
           </p:cNvPicPr>
@@ -9982,9 +9982,9 @@
           </a:stretch>
         </p:blipFill>
         <p:spPr>
-          <a:xfrm>
-            <a:off x="91440" y="3566160"/>
-            <a:ext cx="1338270" cy="1508760"/>
+          <a:xfrm flipH="1">
+            <a:off x="91440" y="3561588"/>
+            <a:ext cx="1689811" cy="1508760"/>
           </a:xfrm>
           <a:prstGeom prst="rect">
             <a:avLst/>
@@ -9993,7 +9993,7 @@
       </p:pic>
       <p:pic>
         <p:nvPicPr>
-          <p:cNvPr id="27" name="Image 1" descr="elephant">    </p:cNvPr>
+          <p:cNvPr id="27" name="Image 1" descr="hippopotamus">    </p:cNvPr>
           <p:cNvPicPr>
             <a:picLocks noChangeAspect="1"/>
           </p:cNvPicPr>
@@ -10007,8 +10007,32 @@
         </p:blipFill>
         <p:spPr>
           <a:xfrm>
-            <a:off x="7113666" y="3337560"/>
-            <a:ext cx="1938894" cy="1737360"/>
+            <a:off x="6349228" y="3332988"/>
+            <a:ext cx="2703332" cy="1737360"/>
+          </a:xfrm>
+          <a:prstGeom prst="rect">
+            <a:avLst/>
+          </a:prstGeom>
+        </p:spPr>
+      </p:pic>
+      <p:pic>
+        <p:nvPicPr>
+          <p:cNvPr id="28" name="Image 2" descr="honeybee">    </p:cNvPr>
+          <p:cNvPicPr>
+            <a:picLocks noChangeAspect="1"/>
+          </p:cNvPicPr>
+          <p:nvPr/>
+        </p:nvPicPr>
+        <p:blipFill>
+          <a:blip r:embed="rId3"/>
+          <a:stretch>
+            <a:fillRect/>
+          </a:stretch>
+        </p:blipFill>
+        <p:spPr>
+          <a:xfrm>
+            <a:off x="4752411" y="45720"/>
+            <a:ext cx="825429" cy="777240"/>
           </a:xfrm>
           <a:prstGeom prst="rect">
             <a:avLst/>
@@ -11289,7 +11313,7 @@
       </p:sp>
       <p:pic>
         <p:nvPicPr>
-          <p:cNvPr id="24" name="Image 0" descr="turtle">    </p:cNvPr>
+          <p:cNvPr id="24" name="Image 0" descr="seal">    </p:cNvPr>
           <p:cNvPicPr>
             <a:picLocks noChangeAspect="1"/>
           </p:cNvPicPr>
@@ -11302,9 +11326,9 @@
           </a:stretch>
         </p:blipFill>
         <p:spPr>
-          <a:xfrm>
-            <a:off x="91440" y="3566160"/>
-            <a:ext cx="1546479" cy="1508760"/>
+          <a:xfrm flipH="1">
+            <a:off x="91440" y="3561588"/>
+            <a:ext cx="1991563" cy="1508760"/>
           </a:xfrm>
           <a:prstGeom prst="rect">
             <a:avLst/>
@@ -11313,7 +11337,7 @@
       </p:pic>
       <p:pic>
         <p:nvPicPr>
-          <p:cNvPr id="25" name="Image 1" descr="elephant">    </p:cNvPr>
+          <p:cNvPr id="25" name="Image 1" descr="spouting_whale">    </p:cNvPr>
           <p:cNvPicPr>
             <a:picLocks noChangeAspect="1"/>
           </p:cNvPicPr>
@@ -11327,8 +11351,8 @@
         </p:blipFill>
         <p:spPr>
           <a:xfrm>
-            <a:off x="7012899" y="3337560"/>
-            <a:ext cx="2039661" cy="1737360"/>
+            <a:off x="7407280" y="3332988"/>
+            <a:ext cx="1645280" cy="1737360"/>
           </a:xfrm>
           <a:prstGeom prst="rect">
             <a:avLst/>
@@ -11337,7 +11361,7 @@
       </p:pic>
       <p:pic>
         <p:nvPicPr>
-          <p:cNvPr id="26" name="Image 2" descr="bird4">    </p:cNvPr>
+          <p:cNvPr id="26" name="Image 2" descr="lady_beetle">    </p:cNvPr>
           <p:cNvPicPr>
             <a:picLocks noChangeAspect="1"/>
           </p:cNvPicPr>
@@ -11350,9 +11374,9 @@
           </a:stretch>
         </p:blipFill>
         <p:spPr>
-          <a:xfrm flipH="1">
-            <a:off x="6216457" y="45720"/>
-            <a:ext cx="1007303" cy="777240"/>
+          <a:xfrm>
+            <a:off x="1920240" y="45720"/>
+            <a:ext cx="780349" cy="777240"/>
           </a:xfrm>
           <a:prstGeom prst="rect">
             <a:avLst/>
@@ -12695,7 +12719,7 @@
       </p:sp>
       <p:pic>
         <p:nvPicPr>
-          <p:cNvPr id="28" name="Image 0" descr="bee">    </p:cNvPr>
+          <p:cNvPr id="28" name="Image 0" descr="bird">    </p:cNvPr>
           <p:cNvPicPr>
             <a:picLocks noChangeAspect="1"/>
           </p:cNvPicPr>
@@ -12709,8 +12733,8 @@
         </p:blipFill>
         <p:spPr>
           <a:xfrm>
-            <a:off x="1005840" y="45720"/>
-            <a:ext cx="802112" cy="777240"/>
+            <a:off x="4835576" y="45720"/>
+            <a:ext cx="742264" cy="777240"/>
           </a:xfrm>
           <a:prstGeom prst="rect">
             <a:avLst/>
@@ -13818,7 +13842,7 @@
       </p:sp>
       <p:pic>
         <p:nvPicPr>
-          <p:cNvPr id="25" name="Image 0" descr="fish">    </p:cNvPr>
+          <p:cNvPr id="25" name="Image 0" descr="swan">    </p:cNvPr>
           <p:cNvPicPr>
             <a:picLocks noChangeAspect="1"/>
           </p:cNvPicPr>
@@ -13831,9 +13855,9 @@
           </a:stretch>
         </p:blipFill>
         <p:spPr>
-          <a:xfrm>
-            <a:off x="91440" y="4343400"/>
-            <a:ext cx="909279" cy="731520"/>
+          <a:xfrm flipH="1">
+            <a:off x="91440" y="4247388"/>
+            <a:ext cx="886328" cy="822960"/>
           </a:xfrm>
           <a:prstGeom prst="rect">
             <a:avLst/>
@@ -13842,7 +13866,7 @@
       </p:pic>
       <p:pic>
         <p:nvPicPr>
-          <p:cNvPr id="26" name="Image 1" descr="bird">    </p:cNvPr>
+          <p:cNvPr id="26" name="Image 1" descr="butterfly">    </p:cNvPr>
           <p:cNvPicPr>
             <a:picLocks noChangeAspect="1"/>
           </p:cNvPicPr>
@@ -13856,32 +13880,8 @@
         </p:blipFill>
         <p:spPr>
           <a:xfrm>
-            <a:off x="8480511" y="4343400"/>
-            <a:ext cx="572049" cy="731520"/>
-          </a:xfrm>
-          <a:prstGeom prst="rect">
-            <a:avLst/>
-          </a:prstGeom>
-        </p:spPr>
-      </p:pic>
-      <p:pic>
-        <p:nvPicPr>
-          <p:cNvPr id="27" name="Image 2" descr="bird2">    </p:cNvPr>
-          <p:cNvPicPr>
-            <a:picLocks noChangeAspect="1"/>
-          </p:cNvPicPr>
-          <p:nvPr/>
-        </p:nvPicPr>
-        <p:blipFill>
-          <a:blip r:embed="rId3"/>
-          <a:stretch>
-            <a:fillRect/>
-          </a:stretch>
-        </p:blipFill>
-        <p:spPr>
-          <a:xfrm flipH="1">
-            <a:off x="5505420" y="45720"/>
-            <a:ext cx="803940" cy="640080"/>
+            <a:off x="2834640" y="45720"/>
+            <a:ext cx="777240" cy="777240"/>
           </a:xfrm>
           <a:prstGeom prst="rect">
             <a:avLst/>
@@ -14862,7 +14862,7 @@
       </p:sp>
       <p:pic>
         <p:nvPicPr>
-          <p:cNvPr id="20" name="Image 0" descr="elephant">    </p:cNvPr>
+          <p:cNvPr id="20" name="Image 0" descr="cow">    </p:cNvPr>
           <p:cNvPicPr>
             <a:picLocks noChangeAspect="1"/>
           </p:cNvPicPr>
@@ -14875,9 +14875,9 @@
           </a:stretch>
         </p:blipFill>
         <p:spPr>
-          <a:xfrm>
-            <a:off x="91440" y="3657600"/>
-            <a:ext cx="1561887" cy="1417320"/>
+          <a:xfrm flipH="1">
+            <a:off x="91440" y="3653028"/>
+            <a:ext cx="1498107" cy="1417320"/>
           </a:xfrm>
           <a:prstGeom prst="rect">
             <a:avLst/>
@@ -14886,7 +14886,7 @@
       </p:pic>
       <p:pic>
         <p:nvPicPr>
-          <p:cNvPr id="21" name="Image 1" descr="bird">    </p:cNvPr>
+          <p:cNvPr id="21" name="Image 1" descr="camel">    </p:cNvPr>
           <p:cNvPicPr>
             <a:picLocks noChangeAspect="1"/>
           </p:cNvPicPr>
@@ -14900,8 +14900,8 @@
         </p:blipFill>
         <p:spPr>
           <a:xfrm>
-            <a:off x="7986187" y="3520440"/>
-            <a:ext cx="1066373" cy="1554480"/>
+            <a:off x="7440564" y="3515868"/>
+            <a:ext cx="1611996" cy="1554480"/>
           </a:xfrm>
           <a:prstGeom prst="rect">
             <a:avLst/>
@@ -14910,7 +14910,7 @@
       </p:pic>
       <p:pic>
         <p:nvPicPr>
-          <p:cNvPr id="22" name="Image 2" descr="butterfly1">    </p:cNvPr>
+          <p:cNvPr id="22" name="Image 2" descr="dove">    </p:cNvPr>
           <p:cNvPicPr>
             <a:picLocks noChangeAspect="1"/>
           </p:cNvPicPr>
@@ -14924,8 +14924,8 @@
         </p:blipFill>
         <p:spPr>
           <a:xfrm>
-            <a:off x="1920240" y="45720"/>
-            <a:ext cx="906262" cy="777240"/>
+            <a:off x="5762915" y="45720"/>
+            <a:ext cx="546445" cy="548640"/>
           </a:xfrm>
           <a:prstGeom prst="rect">
             <a:avLst/>
@@ -15931,7 +15931,7 @@
       </p:sp>
       <p:pic>
         <p:nvPicPr>
-          <p:cNvPr id="21" name="Image 0" descr="duck">    </p:cNvPr>
+          <p:cNvPr id="21" name="Image 0" descr="giraffe">    </p:cNvPr>
           <p:cNvPicPr>
             <a:picLocks noChangeAspect="1"/>
           </p:cNvPicPr>
@@ -15944,9 +15944,9 @@
           </a:stretch>
         </p:blipFill>
         <p:spPr>
-          <a:xfrm>
-            <a:off x="91440" y="3794760"/>
-            <a:ext cx="1081735" cy="1280160"/>
+          <a:xfrm flipH="1">
+            <a:off x="91440" y="3881628"/>
+            <a:ext cx="1115019" cy="1188720"/>
           </a:xfrm>
           <a:prstGeom prst="rect">
             <a:avLst/>
@@ -15955,7 +15955,7 @@
       </p:pic>
       <p:pic>
         <p:nvPicPr>
-          <p:cNvPr id="22" name="Image 1" descr="bird">    </p:cNvPr>
+          <p:cNvPr id="22" name="Image 1" descr="owl">    </p:cNvPr>
           <p:cNvPicPr>
             <a:picLocks noChangeAspect="1"/>
           </p:cNvPicPr>
@@ -15969,8 +15969,8 @@
         </p:blipFill>
         <p:spPr>
           <a:xfrm>
-            <a:off x="8349752" y="4251960"/>
-            <a:ext cx="702808" cy="822960"/>
+            <a:off x="8333842" y="4155948"/>
+            <a:ext cx="718718" cy="914400"/>
           </a:xfrm>
           <a:prstGeom prst="rect">
             <a:avLst/>
@@ -15979,7 +15979,7 @@
       </p:pic>
       <p:pic>
         <p:nvPicPr>
-          <p:cNvPr id="23" name="Image 2" descr="bird1">    </p:cNvPr>
+          <p:cNvPr id="23" name="Image 2" descr="honeybee">    </p:cNvPr>
           <p:cNvPicPr>
             <a:picLocks noChangeAspect="1"/>
           </p:cNvPicPr>
@@ -15993,8 +15993,8 @@
         </p:blipFill>
         <p:spPr>
           <a:xfrm flipH="1">
-            <a:off x="5302057" y="45720"/>
-            <a:ext cx="1007303" cy="777240"/>
+            <a:off x="1920240" y="45720"/>
+            <a:ext cx="825429" cy="777240"/>
           </a:xfrm>
           <a:prstGeom prst="rect">
             <a:avLst/>
@@ -17025,7 +17025,7 @@
       </p:sp>
       <p:pic>
         <p:nvPicPr>
-          <p:cNvPr id="22" name="Image 0" descr="elephant">    </p:cNvPr>
+          <p:cNvPr id="22" name="Image 0" descr="goat">    </p:cNvPr>
           <p:cNvPicPr>
             <a:picLocks noChangeAspect="1"/>
           </p:cNvPicPr>
@@ -17039,8 +17039,8 @@
         </p:blipFill>
         <p:spPr>
           <a:xfrm>
-            <a:off x="91440" y="3657600"/>
-            <a:ext cx="1561887" cy="1417320"/>
+            <a:off x="91440" y="3653028"/>
+            <a:ext cx="1517950" cy="1417320"/>
           </a:xfrm>
           <a:prstGeom prst="rect">
             <a:avLst/>
@@ -17049,7 +17049,7 @@
       </p:pic>
       <p:pic>
         <p:nvPicPr>
-          <p:cNvPr id="23" name="Image 1" descr="bird">    </p:cNvPr>
+          <p:cNvPr id="23" name="Image 1" descr="swan">    </p:cNvPr>
           <p:cNvPicPr>
             <a:picLocks noChangeAspect="1"/>
           </p:cNvPicPr>
@@ -17063,8 +17063,32 @@
         </p:blipFill>
         <p:spPr>
           <a:xfrm>
-            <a:off x="7986187" y="3520440"/>
-            <a:ext cx="1066373" cy="1554480"/>
+            <a:off x="7378385" y="3515868"/>
+            <a:ext cx="1674175" cy="1554480"/>
+          </a:xfrm>
+          <a:prstGeom prst="rect">
+            <a:avLst/>
+          </a:prstGeom>
+        </p:spPr>
+      </p:pic>
+      <p:pic>
+        <p:nvPicPr>
+          <p:cNvPr id="24" name="Image 2" descr="butterfly">    </p:cNvPr>
+          <p:cNvPicPr>
+            <a:picLocks noChangeAspect="1"/>
+          </p:cNvPicPr>
+          <p:nvPr/>
+        </p:nvPicPr>
+        <p:blipFill>
+          <a:blip r:embed="rId3"/>
+          <a:stretch>
+            <a:fillRect/>
+          </a:stretch>
+        </p:blipFill>
+        <p:spPr>
+          <a:xfrm>
+            <a:off x="4800600" y="45720"/>
+            <a:ext cx="777240" cy="777240"/>
           </a:xfrm>
           <a:prstGeom prst="rect">
             <a:avLst/>
@@ -18095,7 +18119,7 @@
       </p:sp>
       <p:pic>
         <p:nvPicPr>
-          <p:cNvPr id="22" name="Image 0" descr="dog">    </p:cNvPr>
+          <p:cNvPr id="22" name="Image 0" descr="llama">    </p:cNvPr>
           <p:cNvPicPr>
             <a:picLocks noChangeAspect="1"/>
           </p:cNvPicPr>
@@ -18108,9 +18132,9 @@
           </a:stretch>
         </p:blipFill>
         <p:spPr>
-          <a:xfrm>
-            <a:off x="91440" y="3657600"/>
-            <a:ext cx="1339367" cy="1417320"/>
+          <a:xfrm flipH="1">
+            <a:off x="91440" y="3653028"/>
+            <a:ext cx="1322360" cy="1417320"/>
           </a:xfrm>
           <a:prstGeom prst="rect">
             <a:avLst/>
@@ -18119,7 +18143,7 @@
       </p:pic>
       <p:pic>
         <p:nvPicPr>
-          <p:cNvPr id="23" name="Image 1" descr="bird">    </p:cNvPr>
+          <p:cNvPr id="23" name="Image 1" descr="ewe">    </p:cNvPr>
           <p:cNvPicPr>
             <a:picLocks noChangeAspect="1"/>
           </p:cNvPicPr>
@@ -18133,8 +18157,32 @@
         </p:blipFill>
         <p:spPr>
           <a:xfrm>
-            <a:off x="7894472" y="3520440"/>
-            <a:ext cx="1158088" cy="1554480"/>
+            <a:off x="7498080" y="3515868"/>
+            <a:ext cx="1554480" cy="1554480"/>
+          </a:xfrm>
+          <a:prstGeom prst="rect">
+            <a:avLst/>
+          </a:prstGeom>
+        </p:spPr>
+      </p:pic>
+      <p:pic>
+        <p:nvPicPr>
+          <p:cNvPr id="24" name="Image 2" descr="lady_beetle">    </p:cNvPr>
+          <p:cNvPicPr>
+            <a:picLocks noChangeAspect="1"/>
+          </p:cNvPicPr>
+          <p:nvPr/>
+        </p:nvPicPr>
+        <p:blipFill>
+          <a:blip r:embed="rId3"/>
+          <a:stretch>
+            <a:fillRect/>
+          </a:stretch>
+        </p:blipFill>
+        <p:spPr>
+          <a:xfrm>
+            <a:off x="4797491" y="45720"/>
+            <a:ext cx="780349" cy="777240"/>
           </a:xfrm>
           <a:prstGeom prst="rect">
             <a:avLst/>
@@ -19125,7 +19173,7 @@
       </p:sp>
       <p:pic>
         <p:nvPicPr>
-          <p:cNvPr id="20" name="Image 0" descr="cat">    </p:cNvPr>
+          <p:cNvPr id="20" name="Image 0" descr="tropical_fish">    </p:cNvPr>
           <p:cNvPicPr>
             <a:picLocks noChangeAspect="1"/>
           </p:cNvPicPr>
@@ -19138,9 +19186,9 @@
           </a:stretch>
         </p:blipFill>
         <p:spPr>
-          <a:xfrm>
-            <a:off x="91440" y="3657600"/>
-            <a:ext cx="1206139" cy="1417320"/>
+          <a:xfrm flipH="1">
+            <a:off x="91440" y="3653028"/>
+            <a:ext cx="1724878" cy="1417320"/>
           </a:xfrm>
           <a:prstGeom prst="rect">
             <a:avLst/>
@@ -19149,7 +19197,7 @@
       </p:pic>
       <p:pic>
         <p:nvPicPr>
-          <p:cNvPr id="21" name="Image 1" descr="elephant">    </p:cNvPr>
+          <p:cNvPr id="21" name="Image 1" descr="duck">    </p:cNvPr>
           <p:cNvPicPr>
             <a:picLocks noChangeAspect="1"/>
           </p:cNvPicPr>
@@ -19163,8 +19211,8 @@
         </p:blipFill>
         <p:spPr>
           <a:xfrm>
-            <a:off x="7493417" y="3520440"/>
-            <a:ext cx="1559143" cy="1554480"/>
+            <a:off x="7498080" y="3515868"/>
+            <a:ext cx="1554480" cy="1554480"/>
           </a:xfrm>
           <a:prstGeom prst="rect">
             <a:avLst/>
@@ -19173,7 +19221,7 @@
       </p:pic>
       <p:pic>
         <p:nvPicPr>
-          <p:cNvPr id="22" name="Image 2" descr="bee">    </p:cNvPr>
+          <p:cNvPr id="22" name="Image 2" descr="bird">    </p:cNvPr>
           <p:cNvPicPr>
             <a:picLocks noChangeAspect="1"/>
           </p:cNvPicPr>
@@ -19186,9 +19234,9 @@
           </a:stretch>
         </p:blipFill>
         <p:spPr>
-          <a:xfrm>
-            <a:off x="6421648" y="45720"/>
-            <a:ext cx="802112" cy="777240"/>
+          <a:xfrm flipH="1">
+            <a:off x="1920240" y="45720"/>
+            <a:ext cx="742264" cy="777240"/>
           </a:xfrm>
           <a:prstGeom prst="rect">
             <a:avLst/>
@@ -20369,7 +20417,7 @@
       </p:sp>
       <p:pic>
         <p:nvPicPr>
-          <p:cNvPr id="28" name="Image 0" descr="bird2">    </p:cNvPr>
+          <p:cNvPr id="28" name="Image 0" descr="butterfly">    </p:cNvPr>
           <p:cNvPicPr>
             <a:picLocks noChangeAspect="1"/>
           </p:cNvPicPr>
@@ -20383,8 +20431,8 @@
         </p:blipFill>
         <p:spPr>
           <a:xfrm>
-            <a:off x="1005840" y="45720"/>
-            <a:ext cx="976213" cy="777240"/>
+            <a:off x="4800600" y="45720"/>
+            <a:ext cx="777240" cy="777240"/>
           </a:xfrm>
           <a:prstGeom prst="rect">
             <a:avLst/>
@@ -21393,7 +21441,7 @@
       </p:sp>
       <p:pic>
         <p:nvPicPr>
-          <p:cNvPr id="22" name="Image 0" descr="turtle">    </p:cNvPr>
+          <p:cNvPr id="22" name="Image 0" descr="ewe">    </p:cNvPr>
           <p:cNvPicPr>
             <a:picLocks noChangeAspect="1"/>
           </p:cNvPicPr>
@@ -21406,9 +21454,9 @@
           </a:stretch>
         </p:blipFill>
         <p:spPr>
-          <a:xfrm>
-            <a:off x="91440" y="1783080"/>
-            <a:ext cx="1593342" cy="1554480"/>
+          <a:xfrm flipH="1">
+            <a:off x="91440" y="1828800"/>
+            <a:ext cx="1463040" cy="1463040"/>
           </a:xfrm>
           <a:prstGeom prst="rect">
             <a:avLst/>
@@ -21417,7 +21465,7 @@
       </p:pic>
       <p:pic>
         <p:nvPicPr>
-          <p:cNvPr id="23" name="Image 1" descr="elephant">    </p:cNvPr>
+          <p:cNvPr id="23" name="Image 1" descr="dog">    </p:cNvPr>
           <p:cNvPicPr>
             <a:picLocks noChangeAspect="1"/>
           </p:cNvPicPr>
@@ -21431,8 +21479,8 @@
         </p:blipFill>
         <p:spPr>
           <a:xfrm>
-            <a:off x="7227600" y="1783080"/>
-            <a:ext cx="1824960" cy="1554480"/>
+            <a:off x="7413955" y="1828800"/>
+            <a:ext cx="1638605" cy="1463040"/>
           </a:xfrm>
           <a:prstGeom prst="rect">
             <a:avLst/>
@@ -21441,7 +21489,7 @@
       </p:pic>
       <p:pic>
         <p:nvPicPr>
-          <p:cNvPr id="24" name="Image 2" descr="butterfly1">    </p:cNvPr>
+          <p:cNvPr id="24" name="Image 2" descr="dove">    </p:cNvPr>
           <p:cNvPicPr>
             <a:picLocks noChangeAspect="1"/>
           </p:cNvPicPr>
@@ -21454,9 +21502,9 @@
           </a:stretch>
         </p:blipFill>
         <p:spPr>
-          <a:xfrm>
-            <a:off x="5456408" y="45720"/>
-            <a:ext cx="852952" cy="731520"/>
+          <a:xfrm flipH="1">
+            <a:off x="2834640" y="45720"/>
+            <a:ext cx="774131" cy="777240"/>
           </a:xfrm>
           <a:prstGeom prst="rect">
             <a:avLst/>
@@ -22266,7 +22314,7 @@
       </p:sp>
       <p:pic>
         <p:nvPicPr>
-          <p:cNvPr id="17" name="Image 0" descr="rabbit">    </p:cNvPr>
+          <p:cNvPr id="17" name="Image 0" descr="horse">    </p:cNvPr>
           <p:cNvPicPr>
             <a:picLocks noChangeAspect="1"/>
           </p:cNvPicPr>
@@ -22279,9 +22327,9 @@
           </a:stretch>
         </p:blipFill>
         <p:spPr>
-          <a:xfrm>
-            <a:off x="91440" y="1783080"/>
-            <a:ext cx="1162751" cy="1554480"/>
+          <a:xfrm flipH="1">
+            <a:off x="91440" y="1828800"/>
+            <a:ext cx="1463040" cy="1463040"/>
           </a:xfrm>
           <a:prstGeom prst="rect">
             <a:avLst/>
@@ -22290,7 +22338,7 @@
       </p:pic>
       <p:pic>
         <p:nvPicPr>
-          <p:cNvPr id="18" name="Image 1" descr="elephant">    </p:cNvPr>
+          <p:cNvPr id="18" name="Image 1" descr="rooster">    </p:cNvPr>
           <p:cNvPicPr>
             <a:picLocks noChangeAspect="1"/>
           </p:cNvPicPr>
@@ -22304,8 +22352,8 @@
         </p:blipFill>
         <p:spPr>
           <a:xfrm>
-            <a:off x="7299107" y="1783080"/>
-            <a:ext cx="1753453" cy="1554480"/>
+            <a:off x="7642189" y="1828800"/>
+            <a:ext cx="1410371" cy="1463040"/>
           </a:xfrm>
           <a:prstGeom prst="rect">
             <a:avLst/>
@@ -22314,7 +22362,7 @@
       </p:pic>
       <p:pic>
         <p:nvPicPr>
-          <p:cNvPr id="19" name="Image 2" descr="bird1">    </p:cNvPr>
+          <p:cNvPr id="19" name="Image 2" descr="honeybee">    </p:cNvPr>
           <p:cNvPicPr>
             <a:picLocks noChangeAspect="1"/>
           </p:cNvPicPr>
@@ -22328,8 +22376,8 @@
         </p:blipFill>
         <p:spPr>
           <a:xfrm>
-            <a:off x="1920240" y="45720"/>
-            <a:ext cx="888797" cy="685800"/>
+            <a:off x="5775259" y="45720"/>
+            <a:ext cx="534101" cy="502920"/>
           </a:xfrm>
           <a:prstGeom prst="rect">
             <a:avLst/>
@@ -23164,7 +23212,7 @@
       </p:sp>
       <p:pic>
         <p:nvPicPr>
-          <p:cNvPr id="18" name="Image 0" descr="fish">    </p:cNvPr>
+          <p:cNvPr id="18" name="Image 0" descr="penguin">    </p:cNvPr>
           <p:cNvPicPr>
             <a:picLocks noChangeAspect="1"/>
           </p:cNvPicPr>
@@ -23178,8 +23226,8 @@
         </p:blipFill>
         <p:spPr>
           <a:xfrm>
-            <a:off x="91440" y="1783080"/>
-            <a:ext cx="1932219" cy="1554480"/>
+            <a:off x="91440" y="1828800"/>
+            <a:ext cx="1479133" cy="1463040"/>
           </a:xfrm>
           <a:prstGeom prst="rect">
             <a:avLst/>
@@ -23188,7 +23236,7 @@
       </p:pic>
       <p:pic>
         <p:nvPicPr>
-          <p:cNvPr id="19" name="Image 1" descr="bird">    </p:cNvPr>
+          <p:cNvPr id="19" name="Image 1" descr="hedgehog">    </p:cNvPr>
           <p:cNvPicPr>
             <a:picLocks noChangeAspect="1"/>
           </p:cNvPicPr>
@@ -23202,8 +23250,8 @@
         </p:blipFill>
         <p:spPr>
           <a:xfrm>
-            <a:off x="7836957" y="1783080"/>
-            <a:ext cx="1215603" cy="1554480"/>
+            <a:off x="7147682" y="1828800"/>
+            <a:ext cx="1904878" cy="1463040"/>
           </a:xfrm>
           <a:prstGeom prst="rect">
             <a:avLst/>
@@ -23212,7 +23260,7 @@
       </p:pic>
       <p:pic>
         <p:nvPicPr>
-          <p:cNvPr id="20" name="Image 2" descr="bird4">    </p:cNvPr>
+          <p:cNvPr id="20" name="Image 2" descr="lady_beetle">    </p:cNvPr>
           <p:cNvPicPr>
             <a:picLocks noChangeAspect="1"/>
           </p:cNvPicPr>
@@ -23225,9 +23273,9 @@
           </a:stretch>
         </p:blipFill>
         <p:spPr>
-          <a:xfrm flipH="1">
-            <a:off x="5302057" y="45720"/>
-            <a:ext cx="1007303" cy="777240"/>
+          <a:xfrm>
+            <a:off x="1920240" y="45720"/>
+            <a:ext cx="780349" cy="777240"/>
           </a:xfrm>
           <a:prstGeom prst="rect">
             <a:avLst/>
@@ -24087,7 +24135,7 @@
       </p:sp>
       <p:pic>
         <p:nvPicPr>
-          <p:cNvPr id="19" name="Image 0" descr="elephant">    </p:cNvPr>
+          <p:cNvPr id="19" name="Image 0" descr="baby_chick">    </p:cNvPr>
           <p:cNvPicPr>
             <a:picLocks noChangeAspect="1"/>
           </p:cNvPicPr>
@@ -24100,9 +24148,9 @@
           </a:stretch>
         </p:blipFill>
         <p:spPr>
-          <a:xfrm>
-            <a:off x="91440" y="1783080"/>
-            <a:ext cx="1713037" cy="1554480"/>
+          <a:xfrm flipH="1">
+            <a:off x="91440" y="1828800"/>
+            <a:ext cx="1575694" cy="1463040"/>
           </a:xfrm>
           <a:prstGeom prst="rect">
             <a:avLst/>
@@ -24111,7 +24159,7 @@
       </p:pic>
       <p:pic>
         <p:nvPicPr>
-          <p:cNvPr id="20" name="Image 1" descr="bird">    </p:cNvPr>
+          <p:cNvPr id="20" name="Image 1" descr="chipmunk">    </p:cNvPr>
           <p:cNvPicPr>
             <a:picLocks noChangeAspect="1"/>
           </p:cNvPicPr>
@@ -24125,8 +24173,32 @@
         </p:blipFill>
         <p:spPr>
           <a:xfrm>
-            <a:off x="7986187" y="1783080"/>
-            <a:ext cx="1066373" cy="1554480"/>
+            <a:off x="7535388" y="1828800"/>
+            <a:ext cx="1517172" cy="1463040"/>
+          </a:xfrm>
+          <a:prstGeom prst="rect">
+            <a:avLst/>
+          </a:prstGeom>
+        </p:spPr>
+      </p:pic>
+      <p:pic>
+        <p:nvPicPr>
+          <p:cNvPr id="21" name="Image 2" descr="bird">    </p:cNvPr>
+          <p:cNvPicPr>
+            <a:picLocks noChangeAspect="1"/>
+          </p:cNvPicPr>
+          <p:nvPr/>
+        </p:nvPicPr>
+        <p:blipFill>
+          <a:blip r:embed="rId3"/>
+          <a:stretch>
+            <a:fillRect/>
+          </a:stretch>
+        </p:blipFill>
+        <p:spPr>
+          <a:xfrm>
+            <a:off x="4835576" y="45720"/>
+            <a:ext cx="742264" cy="777240"/>
           </a:xfrm>
           <a:prstGeom prst="rect">
             <a:avLst/>
@@ -25045,7 +25117,7 @@
       </p:sp>
       <p:pic>
         <p:nvPicPr>
-          <p:cNvPr id="20" name="Image 0" descr="duck">    </p:cNvPr>
+          <p:cNvPr id="20" name="Image 0" descr="swan">    </p:cNvPr>
           <p:cNvPicPr>
             <a:picLocks noChangeAspect="1"/>
           </p:cNvPicPr>
@@ -25058,9 +25130,9 @@
           </a:stretch>
         </p:blipFill>
         <p:spPr>
-          <a:xfrm>
-            <a:off x="91440" y="3657600"/>
-            <a:ext cx="1197635" cy="1417320"/>
+          <a:xfrm flipH="1">
+            <a:off x="91440" y="3653028"/>
+            <a:ext cx="1526454" cy="1417320"/>
           </a:xfrm>
           <a:prstGeom prst="rect">
             <a:avLst/>
@@ -25069,7 +25141,7 @@
       </p:pic>
       <p:pic>
         <p:nvPicPr>
-          <p:cNvPr id="21" name="Image 1" descr="bird">    </p:cNvPr>
+          <p:cNvPr id="21" name="Image 1" descr="turtle">    </p:cNvPr>
           <p:cNvPicPr>
             <a:picLocks noChangeAspect="1"/>
           </p:cNvPicPr>
@@ -25083,8 +25155,8 @@
         </p:blipFill>
         <p:spPr>
           <a:xfrm>
-            <a:off x="7725034" y="3520440"/>
-            <a:ext cx="1327526" cy="1554480"/>
+            <a:off x="6546738" y="3515868"/>
+            <a:ext cx="2505822" cy="1554480"/>
           </a:xfrm>
           <a:prstGeom prst="rect">
             <a:avLst/>
@@ -25093,7 +25165,7 @@
       </p:pic>
       <p:pic>
         <p:nvPicPr>
-          <p:cNvPr id="22" name="Image 2" descr="butterfly1">    </p:cNvPr>
+          <p:cNvPr id="22" name="Image 2" descr="dove">    </p:cNvPr>
           <p:cNvPicPr>
             <a:picLocks noChangeAspect="1"/>
           </p:cNvPicPr>
@@ -25106,9 +25178,9 @@
           </a:stretch>
         </p:blipFill>
         <p:spPr>
-          <a:xfrm>
-            <a:off x="6317498" y="45720"/>
-            <a:ext cx="906262" cy="777240"/>
+          <a:xfrm flipH="1">
+            <a:off x="1920240" y="45720"/>
+            <a:ext cx="774131" cy="777240"/>
           </a:xfrm>
           <a:prstGeom prst="rect">
             <a:avLst/>
@@ -26289,7 +26361,7 @@
       </p:sp>
       <p:pic>
         <p:nvPicPr>
-          <p:cNvPr id="28" name="Image 0" descr="bird1">    </p:cNvPr>
+          <p:cNvPr id="28" name="Image 0" descr="honeybee">    </p:cNvPr>
           <p:cNvPicPr>
             <a:picLocks noChangeAspect="1"/>
           </p:cNvPicPr>
@@ -26303,8 +26375,8 @@
         </p:blipFill>
         <p:spPr>
           <a:xfrm>
-            <a:off x="1005840" y="45720"/>
-            <a:ext cx="1007303" cy="777240"/>
+            <a:off x="4752411" y="45720"/>
+            <a:ext cx="825429" cy="777240"/>
           </a:xfrm>
           <a:prstGeom prst="rect">
             <a:avLst/>
@@ -27412,7 +27484,7 @@
       </p:sp>
       <p:pic>
         <p:nvPicPr>
-          <p:cNvPr id="25" name="Image 0" descr="cat">    </p:cNvPr>
+          <p:cNvPr id="25" name="Image 0" descr="chipmunk">    </p:cNvPr>
           <p:cNvPicPr>
             <a:picLocks noChangeAspect="1"/>
           </p:cNvPicPr>
@@ -27425,9 +27497,9 @@
           </a:stretch>
         </p:blipFill>
         <p:spPr>
-          <a:xfrm>
-            <a:off x="91440" y="4023360"/>
-            <a:ext cx="894878" cy="1051560"/>
+          <a:xfrm flipH="1">
+            <a:off x="91440" y="4201668"/>
+            <a:ext cx="900821" cy="868680"/>
           </a:xfrm>
           <a:prstGeom prst="rect">
             <a:avLst/>
@@ -27436,7 +27508,7 @@
       </p:pic>
       <p:pic>
         <p:nvPicPr>
-          <p:cNvPr id="26" name="Image 1" descr="bird4">    </p:cNvPr>
+          <p:cNvPr id="26" name="Image 1" descr="lady_beetle">    </p:cNvPr>
           <p:cNvPicPr>
             <a:picLocks noChangeAspect="1"/>
           </p:cNvPicPr>
@@ -27449,9 +27521,9 @@
           </a:stretch>
         </p:blipFill>
         <p:spPr>
-          <a:xfrm flipH="1">
-            <a:off x="5479816" y="45720"/>
-            <a:ext cx="829544" cy="640080"/>
+          <a:xfrm>
+            <a:off x="2834640" y="45720"/>
+            <a:ext cx="780349" cy="777240"/>
           </a:xfrm>
           <a:prstGeom prst="rect">
             <a:avLst/>
@@ -28432,7 +28504,7 @@
       </p:sp>
       <p:pic>
         <p:nvPicPr>
-          <p:cNvPr id="20" name="Image 0" descr="bird">    </p:cNvPr>
+          <p:cNvPr id="20" name="Image 0" descr="flamingo">    </p:cNvPr>
           <p:cNvPicPr>
             <a:picLocks noChangeAspect="1"/>
           </p:cNvPicPr>
@@ -28445,9 +28517,9 @@
           </a:stretch>
         </p:blipFill>
         <p:spPr>
-          <a:xfrm>
-            <a:off x="91440" y="3657600"/>
-            <a:ext cx="1257163" cy="1417320"/>
+          <a:xfrm flipH="1">
+            <a:off x="91440" y="3653028"/>
+            <a:ext cx="1106927" cy="1417320"/>
           </a:xfrm>
           <a:prstGeom prst="rect">
             <a:avLst/>
@@ -28456,7 +28528,7 @@
       </p:pic>
       <p:pic>
         <p:nvPicPr>
-          <p:cNvPr id="21" name="Image 1" descr="elephant">    </p:cNvPr>
+          <p:cNvPr id="21" name="Image 1" descr="hatching_chick">    </p:cNvPr>
           <p:cNvPicPr>
             <a:picLocks noChangeAspect="1"/>
           </p:cNvPicPr>
@@ -28470,8 +28542,8 @@
         </p:blipFill>
         <p:spPr>
           <a:xfrm>
-            <a:off x="7317760" y="3520440"/>
-            <a:ext cx="1734800" cy="1554480"/>
+            <a:off x="7498080" y="3515868"/>
+            <a:ext cx="1554480" cy="1554480"/>
           </a:xfrm>
           <a:prstGeom prst="rect">
             <a:avLst/>
@@ -28480,7 +28552,7 @@
       </p:pic>
       <p:pic>
         <p:nvPicPr>
-          <p:cNvPr id="22" name="Image 2" descr="bee">    </p:cNvPr>
+          <p:cNvPr id="22" name="Image 2" descr="bird">    </p:cNvPr>
           <p:cNvPicPr>
             <a:picLocks noChangeAspect="1"/>
           </p:cNvPicPr>
@@ -28494,8 +28566,8 @@
         </p:blipFill>
         <p:spPr>
           <a:xfrm>
-            <a:off x="1920240" y="45720"/>
-            <a:ext cx="802112" cy="777240"/>
+            <a:off x="5785409" y="45720"/>
+            <a:ext cx="523951" cy="548640"/>
           </a:xfrm>
           <a:prstGeom prst="rect">
             <a:avLst/>
@@ -29501,7 +29573,7 @@
       </p:sp>
       <p:pic>
         <p:nvPicPr>
-          <p:cNvPr id="21" name="Image 0" descr="turtle">    </p:cNvPr>
+          <p:cNvPr id="21" name="Image 0" descr="kangaroo">    </p:cNvPr>
           <p:cNvPicPr>
             <a:picLocks noChangeAspect="1"/>
           </p:cNvPicPr>
@@ -29515,8 +29587,8 @@
         </p:blipFill>
         <p:spPr>
           <a:xfrm>
-            <a:off x="91440" y="4023360"/>
-            <a:ext cx="1077849" cy="1051560"/>
+            <a:off x="91440" y="4064508"/>
+            <a:ext cx="1078260" cy="1005840"/>
           </a:xfrm>
           <a:prstGeom prst="rect">
             <a:avLst/>
@@ -29525,7 +29597,7 @@
       </p:pic>
       <p:pic>
         <p:nvPicPr>
-          <p:cNvPr id="22" name="Image 1" descr="bird2">    </p:cNvPr>
+          <p:cNvPr id="22" name="Image 1" descr="cat">    </p:cNvPr>
           <p:cNvPicPr>
             <a:picLocks noChangeAspect="1"/>
           </p:cNvPicPr>
@@ -29538,9 +29610,33 @@
           </a:stretch>
         </p:blipFill>
         <p:spPr>
-          <a:xfrm flipH="1">
-            <a:off x="5333147" y="45720"/>
-            <a:ext cx="976213" cy="777240"/>
+          <a:xfrm>
+            <a:off x="8341385" y="4384548"/>
+            <a:ext cx="711175" cy="685800"/>
+          </a:xfrm>
+          <a:prstGeom prst="rect">
+            <a:avLst/>
+          </a:prstGeom>
+        </p:spPr>
+      </p:pic>
+      <p:pic>
+        <p:nvPicPr>
+          <p:cNvPr id="23" name="Image 2" descr="butterfly">    </p:cNvPr>
+          <p:cNvPicPr>
+            <a:picLocks noChangeAspect="1"/>
+          </p:cNvPicPr>
+          <p:nvPr/>
+        </p:nvPicPr>
+        <p:blipFill>
+          <a:blip r:embed="rId3"/>
+          <a:stretch>
+            <a:fillRect/>
+          </a:stretch>
+        </p:blipFill>
+        <p:spPr>
+          <a:xfrm>
+            <a:off x="1920240" y="45720"/>
+            <a:ext cx="777240" cy="777240"/>
           </a:xfrm>
           <a:prstGeom prst="rect">
             <a:avLst/>
@@ -30584,9 +30680,9 @@
           </a:stretch>
         </p:blipFill>
         <p:spPr>
-          <a:xfrm>
-            <a:off x="91440" y="3657600"/>
-            <a:ext cx="1060155" cy="1417320"/>
+          <a:xfrm flipH="1">
+            <a:off x="91440" y="3653028"/>
+            <a:ext cx="1422989" cy="1417320"/>
           </a:xfrm>
           <a:prstGeom prst="rect">
             <a:avLst/>
@@ -30595,7 +30691,7 @@
       </p:pic>
       <p:pic>
         <p:nvPicPr>
-          <p:cNvPr id="23" name="Image 1" descr="elephant">    </p:cNvPr>
+          <p:cNvPr id="23" name="Image 1" descr="parrot">    </p:cNvPr>
           <p:cNvPicPr>
             <a:picLocks noChangeAspect="1"/>
           </p:cNvPicPr>
@@ -30609,8 +30705,32 @@
         </p:blipFill>
         <p:spPr>
           <a:xfrm>
-            <a:off x="7299107" y="3520440"/>
-            <a:ext cx="1753453" cy="1554480"/>
+            <a:off x="7712598" y="3515868"/>
+            <a:ext cx="1339962" cy="1554480"/>
+          </a:xfrm>
+          <a:prstGeom prst="rect">
+            <a:avLst/>
+          </a:prstGeom>
+        </p:spPr>
+      </p:pic>
+      <p:pic>
+        <p:nvPicPr>
+          <p:cNvPr id="24" name="Image 2" descr="dove">    </p:cNvPr>
+          <p:cNvPicPr>
+            <a:picLocks noChangeAspect="1"/>
+          </p:cNvPicPr>
+          <p:nvPr/>
+        </p:nvPicPr>
+        <p:blipFill>
+          <a:blip r:embed="rId3"/>
+          <a:stretch>
+            <a:fillRect/>
+          </a:stretch>
+        </p:blipFill>
+        <p:spPr>
+          <a:xfrm>
+            <a:off x="4803709" y="45720"/>
+            <a:ext cx="774131" cy="777240"/>
           </a:xfrm>
           <a:prstGeom prst="rect">
             <a:avLst/>
@@ -31729,7 +31849,7 @@
       </p:sp>
       <p:pic>
         <p:nvPicPr>
-          <p:cNvPr id="24" name="Image 0" descr="fish">    </p:cNvPr>
+          <p:cNvPr id="24" name="Image 0" descr="dolphin">    </p:cNvPr>
           <p:cNvPicPr>
             <a:picLocks noChangeAspect="1"/>
           </p:cNvPicPr>
@@ -31742,9 +31862,9 @@
           </a:stretch>
         </p:blipFill>
         <p:spPr>
-          <a:xfrm>
-            <a:off x="91440" y="3566160"/>
-            <a:ext cx="1875389" cy="1508760"/>
+          <a:xfrm flipH="1">
+            <a:off x="91440" y="3561588"/>
+            <a:ext cx="1185885" cy="1508760"/>
           </a:xfrm>
           <a:prstGeom prst="rect">
             <a:avLst/>
@@ -31753,7 +31873,7 @@
       </p:pic>
       <p:pic>
         <p:nvPicPr>
-          <p:cNvPr id="25" name="Image 1" descr="bird">    </p:cNvPr>
+          <p:cNvPr id="25" name="Image 1" descr="crab">    </p:cNvPr>
           <p:cNvPicPr>
             <a:picLocks noChangeAspect="1"/>
           </p:cNvPicPr>
@@ -31767,8 +31887,8 @@
         </p:blipFill>
         <p:spPr>
           <a:xfrm>
-            <a:off x="7693944" y="3337560"/>
-            <a:ext cx="1358616" cy="1737360"/>
+            <a:off x="7106717" y="3332988"/>
+            <a:ext cx="1945843" cy="1737360"/>
           </a:xfrm>
           <a:prstGeom prst="rect">
             <a:avLst/>
@@ -31777,7 +31897,7 @@
       </p:pic>
       <p:pic>
         <p:nvPicPr>
-          <p:cNvPr id="26" name="Image 2" descr="bird1">    </p:cNvPr>
+          <p:cNvPr id="26" name="Image 2" descr="honeybee">    </p:cNvPr>
           <p:cNvPicPr>
             <a:picLocks noChangeAspect="1"/>
           </p:cNvPicPr>
@@ -31791,8 +31911,8 @@
         </p:blipFill>
         <p:spPr>
           <a:xfrm flipH="1">
-            <a:off x="6216457" y="45720"/>
-            <a:ext cx="1007303" cy="777240"/>
+            <a:off x="1920240" y="45720"/>
+            <a:ext cx="825429" cy="777240"/>
           </a:xfrm>
           <a:prstGeom prst="rect">
             <a:avLst/>

--- a/fathah-plus/01-alif.pptx
+++ b/fathah-plus/01-alif.pptx
@@ -3430,7 +3430,7 @@
       </p:sp>
       <p:pic>
         <p:nvPicPr>
-          <p:cNvPr id="14" name="Image 0" descr="deer">    </p:cNvPr>
+          <p:cNvPr id="14" name="Image 0" descr="animal">    </p:cNvPr>
           <p:cNvPicPr>
             <a:picLocks noChangeAspect="1"/>
           </p:cNvPicPr>
@@ -3443,9 +3443,9 @@
           </a:stretch>
         </p:blipFill>
         <p:spPr>
-          <a:xfrm flipH="1">
-            <a:off x="91440" y="1828800"/>
-            <a:ext cx="1463040" cy="1463040"/>
+          <a:xfrm>
+            <a:off x="91440" y="1783080"/>
+            <a:ext cx="1767718" cy="1645920"/>
           </a:xfrm>
           <a:prstGeom prst="rect">
             <a:avLst/>
@@ -3454,7 +3454,7 @@
       </p:pic>
       <p:pic>
         <p:nvPicPr>
-          <p:cNvPr id="15" name="Image 1" descr="elephant">    </p:cNvPr>
+          <p:cNvPr id="15" name="Image 1" descr="animal">    </p:cNvPr>
           <p:cNvPicPr>
             <a:picLocks noChangeAspect="1"/>
           </p:cNvPicPr>
@@ -3468,32 +3468,8 @@
         </p:blipFill>
         <p:spPr>
           <a:xfrm>
-            <a:off x="7280819" y="1828800"/>
-            <a:ext cx="1771741" cy="1463040"/>
-          </a:xfrm>
-          <a:prstGeom prst="rect">
-            <a:avLst/>
-          </a:prstGeom>
-        </p:spPr>
-      </p:pic>
-      <p:pic>
-        <p:nvPicPr>
-          <p:cNvPr id="16" name="Image 2" descr="bird">    </p:cNvPr>
-          <p:cNvPicPr>
-            <a:picLocks noChangeAspect="1"/>
-          </p:cNvPicPr>
-          <p:nvPr/>
-        </p:nvPicPr>
-        <p:blipFill>
-          <a:blip r:embed="rId3"/>
-          <a:stretch>
-            <a:fillRect/>
-          </a:stretch>
-        </p:blipFill>
-        <p:spPr>
-          <a:xfrm flipH="1">
-            <a:off x="1920240" y="45720"/>
-            <a:ext cx="742264" cy="777240"/>
+            <a:off x="6939199" y="1783080"/>
+            <a:ext cx="2113361" cy="1645920"/>
           </a:xfrm>
           <a:prstGeom prst="rect">
             <a:avLst/>
@@ -4525,30 +4501,6 @@
           </a:p>
         </p:txBody>
       </p:sp>
-      <p:pic>
-        <p:nvPicPr>
-          <p:cNvPr id="32" name="Image 0" descr="lady_beetle">    </p:cNvPr>
-          <p:cNvPicPr>
-            <a:picLocks noChangeAspect="1"/>
-          </p:cNvPicPr>
-          <p:nvPr/>
-        </p:nvPicPr>
-        <p:blipFill>
-          <a:blip r:embed="rId1"/>
-          <a:stretch>
-            <a:fillRect/>
-          </a:stretch>
-        </p:blipFill>
-        <p:spPr>
-          <a:xfrm>
-            <a:off x="4797491" y="45720"/>
-            <a:ext cx="780349" cy="777240"/>
-          </a:xfrm>
-          <a:prstGeom prst="rect">
-            <a:avLst/>
-          </a:prstGeom>
-        </p:spPr>
-      </p:pic>
     </p:spTree>
   </p:cSld>
   <p:clrMapOvr>
@@ -5940,7 +5892,7 @@
       </p:sp>
       <p:pic>
         <p:nvPicPr>
-          <p:cNvPr id="29" name="Image 0" descr="bird">    </p:cNvPr>
+          <p:cNvPr id="29" name="Image 0" descr="animal">    </p:cNvPr>
           <p:cNvPicPr>
             <a:picLocks noChangeAspect="1"/>
           </p:cNvPicPr>
@@ -5953,9 +5905,33 @@
           </a:stretch>
         </p:blipFill>
         <p:spPr>
-          <a:xfrm flipH="1">
-            <a:off x="2834640" y="45720"/>
-            <a:ext cx="742264" cy="777240"/>
+          <a:xfrm>
+            <a:off x="91440" y="4110228"/>
+            <a:ext cx="931316" cy="960120"/>
+          </a:xfrm>
+          <a:prstGeom prst="rect">
+            <a:avLst/>
+          </a:prstGeom>
+        </p:spPr>
+      </p:pic>
+      <p:pic>
+        <p:nvPicPr>
+          <p:cNvPr id="30" name="Image 1" descr="kid">    </p:cNvPr>
+          <p:cNvPicPr>
+            <a:picLocks noChangeAspect="1"/>
+          </p:cNvPicPr>
+          <p:nvPr/>
+        </p:nvPicPr>
+        <p:blipFill>
+          <a:blip r:embed="rId2"/>
+          <a:stretch>
+            <a:fillRect/>
+          </a:stretch>
+        </p:blipFill>
+        <p:spPr>
+          <a:xfrm>
+            <a:off x="8467344" y="3927348"/>
+            <a:ext cx="585216" cy="1143000"/>
           </a:xfrm>
           <a:prstGeom prst="rect">
             <a:avLst/>
@@ -7226,7 +7202,7 @@
       </p:sp>
       <p:pic>
         <p:nvPicPr>
-          <p:cNvPr id="24" name="Image 0" descr="peacock">    </p:cNvPr>
+          <p:cNvPr id="24" name="Image 0" descr="kid">    </p:cNvPr>
           <p:cNvPicPr>
             <a:picLocks noChangeAspect="1"/>
           </p:cNvPicPr>
@@ -7241,7 +7217,7 @@
         <p:spPr>
           <a:xfrm>
             <a:off x="91440" y="3561588"/>
-            <a:ext cx="1609847" cy="1508760"/>
+            <a:ext cx="793608" cy="1508760"/>
           </a:xfrm>
           <a:prstGeom prst="rect">
             <a:avLst/>
@@ -7250,7 +7226,7 @@
       </p:pic>
       <p:pic>
         <p:nvPicPr>
-          <p:cNvPr id="25" name="Image 1" descr="duck">    </p:cNvPr>
+          <p:cNvPr id="25" name="Image 1" descr="bird">    </p:cNvPr>
           <p:cNvPicPr>
             <a:picLocks noChangeAspect="1"/>
           </p:cNvPicPr>
@@ -7264,32 +7240,8 @@
         </p:blipFill>
         <p:spPr>
           <a:xfrm>
-            <a:off x="7315200" y="3332988"/>
-            <a:ext cx="1737360" cy="1737360"/>
-          </a:xfrm>
-          <a:prstGeom prst="rect">
-            <a:avLst/>
-          </a:prstGeom>
-        </p:spPr>
-      </p:pic>
-      <p:pic>
-        <p:nvPicPr>
-          <p:cNvPr id="26" name="Image 2" descr="butterfly">    </p:cNvPr>
-          <p:cNvPicPr>
-            <a:picLocks noChangeAspect="1"/>
-          </p:cNvPicPr>
-          <p:nvPr/>
-        </p:nvPicPr>
-        <p:blipFill>
-          <a:blip r:embed="rId3"/>
-          <a:stretch>
-            <a:fillRect/>
-          </a:stretch>
-        </p:blipFill>
-        <p:spPr>
-          <a:xfrm>
-            <a:off x="5760720" y="45720"/>
-            <a:ext cx="548640" cy="548640"/>
+            <a:off x="7492411" y="3332988"/>
+            <a:ext cx="1560149" cy="1737360"/>
           </a:xfrm>
           <a:prstGeom prst="rect">
             <a:avLst/>
@@ -8583,78 +8535,6 @@
           </a:p>
         </p:txBody>
       </p:sp>
-      <p:pic>
-        <p:nvPicPr>
-          <p:cNvPr id="25" name="Image 0" descr="zebra">    </p:cNvPr>
-          <p:cNvPicPr>
-            <a:picLocks noChangeAspect="1"/>
-          </p:cNvPicPr>
-          <p:nvPr/>
-        </p:nvPicPr>
-        <p:blipFill>
-          <a:blip r:embed="rId1"/>
-          <a:stretch>
-            <a:fillRect/>
-          </a:stretch>
-        </p:blipFill>
-        <p:spPr>
-          <a:xfrm>
-            <a:off x="91440" y="3973068"/>
-            <a:ext cx="1097280" cy="1097280"/>
-          </a:xfrm>
-          <a:prstGeom prst="rect">
-            <a:avLst/>
-          </a:prstGeom>
-        </p:spPr>
-      </p:pic>
-      <p:pic>
-        <p:nvPicPr>
-          <p:cNvPr id="26" name="Image 1" descr="snail">    </p:cNvPr>
-          <p:cNvPicPr>
-            <a:picLocks noChangeAspect="1"/>
-          </p:cNvPicPr>
-          <p:nvPr/>
-        </p:nvPicPr>
-        <p:blipFill>
-          <a:blip r:embed="rId2"/>
-          <a:stretch>
-            <a:fillRect/>
-          </a:stretch>
-        </p:blipFill>
-        <p:spPr>
-          <a:xfrm flipH="1">
-            <a:off x="8354416" y="4384548"/>
-            <a:ext cx="698144" cy="685800"/>
-          </a:xfrm>
-          <a:prstGeom prst="rect">
-            <a:avLst/>
-          </a:prstGeom>
-        </p:spPr>
-      </p:pic>
-      <p:pic>
-        <p:nvPicPr>
-          <p:cNvPr id="27" name="Image 2" descr="dove">    </p:cNvPr>
-          <p:cNvPicPr>
-            <a:picLocks noChangeAspect="1"/>
-          </p:cNvPicPr>
-          <p:nvPr/>
-        </p:nvPicPr>
-        <p:blipFill>
-          <a:blip r:embed="rId3"/>
-          <a:stretch>
-            <a:fillRect/>
-          </a:stretch>
-        </p:blipFill>
-        <p:spPr>
-          <a:xfrm flipH="1">
-            <a:off x="1920240" y="45720"/>
-            <a:ext cx="774131" cy="777240"/>
-          </a:xfrm>
-          <a:prstGeom prst="rect">
-            <a:avLst/>
-          </a:prstGeom>
-        </p:spPr>
-      </p:pic>
     </p:spTree>
   </p:cSld>
   <p:clrMapOvr>
@@ -9969,7 +9849,7 @@
       </p:sp>
       <p:pic>
         <p:nvPicPr>
-          <p:cNvPr id="26" name="Image 0" descr="dog">    </p:cNvPr>
+          <p:cNvPr id="26" name="Image 0" descr="kid">    </p:cNvPr>
           <p:cNvPicPr>
             <a:picLocks noChangeAspect="1"/>
           </p:cNvPicPr>
@@ -9982,9 +9862,9 @@
           </a:stretch>
         </p:blipFill>
         <p:spPr>
-          <a:xfrm flipH="1">
+          <a:xfrm>
             <a:off x="91440" y="3561588"/>
-            <a:ext cx="1689811" cy="1508760"/>
+            <a:ext cx="716661" cy="1508760"/>
           </a:xfrm>
           <a:prstGeom prst="rect">
             <a:avLst/>
@@ -9993,7 +9873,7 @@
       </p:pic>
       <p:pic>
         <p:nvPicPr>
-          <p:cNvPr id="27" name="Image 1" descr="hippopotamus">    </p:cNvPr>
+          <p:cNvPr id="27" name="Image 1" descr="kid">    </p:cNvPr>
           <p:cNvPicPr>
             <a:picLocks noChangeAspect="1"/>
           </p:cNvPicPr>
@@ -10007,32 +9887,8 @@
         </p:blipFill>
         <p:spPr>
           <a:xfrm>
-            <a:off x="6349228" y="3332988"/>
-            <a:ext cx="2703332" cy="1737360"/>
-          </a:xfrm>
-          <a:prstGeom prst="rect">
-            <a:avLst/>
-          </a:prstGeom>
-        </p:spPr>
-      </p:pic>
-      <p:pic>
-        <p:nvPicPr>
-          <p:cNvPr id="28" name="Image 2" descr="honeybee">    </p:cNvPr>
-          <p:cNvPicPr>
-            <a:picLocks noChangeAspect="1"/>
-          </p:cNvPicPr>
-          <p:nvPr/>
-        </p:nvPicPr>
-        <p:blipFill>
-          <a:blip r:embed="rId3"/>
-          <a:stretch>
-            <a:fillRect/>
-          </a:stretch>
-        </p:blipFill>
-        <p:spPr>
-          <a:xfrm>
-            <a:off x="4752411" y="45720"/>
-            <a:ext cx="825429" cy="777240"/>
+            <a:off x="8055315" y="3332988"/>
+            <a:ext cx="997245" cy="1737360"/>
           </a:xfrm>
           <a:prstGeom prst="rect">
             <a:avLst/>
@@ -11313,7 +11169,7 @@
       </p:sp>
       <p:pic>
         <p:nvPicPr>
-          <p:cNvPr id="24" name="Image 0" descr="seal">    </p:cNvPr>
+          <p:cNvPr id="24" name="Image 0" descr="animal">    </p:cNvPr>
           <p:cNvPicPr>
             <a:picLocks noChangeAspect="1"/>
           </p:cNvPicPr>
@@ -11326,9 +11182,9 @@
           </a:stretch>
         </p:blipFill>
         <p:spPr>
-          <a:xfrm flipH="1">
+          <a:xfrm>
             <a:off x="91440" y="3561588"/>
-            <a:ext cx="1991563" cy="1508760"/>
+            <a:ext cx="1391077" cy="1508760"/>
           </a:xfrm>
           <a:prstGeom prst="rect">
             <a:avLst/>
@@ -11337,7 +11193,7 @@
       </p:pic>
       <p:pic>
         <p:nvPicPr>
-          <p:cNvPr id="25" name="Image 1" descr="spouting_whale">    </p:cNvPr>
+          <p:cNvPr id="25" name="Image 1" descr="sea">    </p:cNvPr>
           <p:cNvPicPr>
             <a:picLocks noChangeAspect="1"/>
           </p:cNvPicPr>
@@ -11351,32 +11207,8 @@
         </p:blipFill>
         <p:spPr>
           <a:xfrm>
-            <a:off x="7407280" y="3332988"/>
-            <a:ext cx="1645280" cy="1737360"/>
-          </a:xfrm>
-          <a:prstGeom prst="rect">
-            <a:avLst/>
-          </a:prstGeom>
-        </p:spPr>
-      </p:pic>
-      <p:pic>
-        <p:nvPicPr>
-          <p:cNvPr id="26" name="Image 2" descr="lady_beetle">    </p:cNvPr>
-          <p:cNvPicPr>
-            <a:picLocks noChangeAspect="1"/>
-          </p:cNvPicPr>
-          <p:nvPr/>
-        </p:nvPicPr>
-        <p:blipFill>
-          <a:blip r:embed="rId3"/>
-          <a:stretch>
-            <a:fillRect/>
-          </a:stretch>
-        </p:blipFill>
-        <p:spPr>
-          <a:xfrm>
-            <a:off x="1920240" y="45720"/>
-            <a:ext cx="780349" cy="777240"/>
+            <a:off x="6974677" y="3332988"/>
+            <a:ext cx="2077883" cy="1737360"/>
           </a:xfrm>
           <a:prstGeom prst="rect">
             <a:avLst/>
@@ -12719,7 +12551,7 @@
       </p:sp>
       <p:pic>
         <p:nvPicPr>
-          <p:cNvPr id="28" name="Image 0" descr="bird">    </p:cNvPr>
+          <p:cNvPr id="28" name="Image 0" descr="kid">    </p:cNvPr>
           <p:cNvPicPr>
             <a:picLocks noChangeAspect="1"/>
           </p:cNvPicPr>
@@ -12733,8 +12565,8 @@
         </p:blipFill>
         <p:spPr>
           <a:xfrm>
-            <a:off x="4835576" y="45720"/>
-            <a:ext cx="742264" cy="777240"/>
+            <a:off x="91440" y="2080260"/>
+            <a:ext cx="517368" cy="1051560"/>
           </a:xfrm>
           <a:prstGeom prst="rect">
             <a:avLst/>
@@ -13842,7 +13674,7 @@
       </p:sp>
       <p:pic>
         <p:nvPicPr>
-          <p:cNvPr id="25" name="Image 0" descr="swan">    </p:cNvPr>
+          <p:cNvPr id="25" name="Image 0" descr="kid">    </p:cNvPr>
           <p:cNvPicPr>
             <a:picLocks noChangeAspect="1"/>
           </p:cNvPicPr>
@@ -13855,33 +13687,9 @@
           </a:stretch>
         </p:blipFill>
         <p:spPr>
-          <a:xfrm flipH="1">
-            <a:off x="91440" y="4247388"/>
-            <a:ext cx="886328" cy="822960"/>
-          </a:xfrm>
-          <a:prstGeom prst="rect">
-            <a:avLst/>
-          </a:prstGeom>
-        </p:spPr>
-      </p:pic>
-      <p:pic>
-        <p:nvPicPr>
-          <p:cNvPr id="26" name="Image 1" descr="butterfly">    </p:cNvPr>
-          <p:cNvPicPr>
-            <a:picLocks noChangeAspect="1"/>
-          </p:cNvPicPr>
-          <p:nvPr/>
-        </p:nvPicPr>
-        <p:blipFill>
-          <a:blip r:embed="rId2"/>
-          <a:stretch>
-            <a:fillRect/>
-          </a:stretch>
-        </p:blipFill>
-        <p:spPr>
-          <a:xfrm>
-            <a:off x="2834640" y="45720"/>
-            <a:ext cx="777240" cy="777240"/>
+          <a:xfrm>
+            <a:off x="8490295" y="4064508"/>
+            <a:ext cx="562265" cy="1005840"/>
           </a:xfrm>
           <a:prstGeom prst="rect">
             <a:avLst/>
@@ -14862,7 +14670,7 @@
       </p:sp>
       <p:pic>
         <p:nvPicPr>
-          <p:cNvPr id="20" name="Image 0" descr="cow">    </p:cNvPr>
+          <p:cNvPr id="20" name="Image 0" descr="kid">    </p:cNvPr>
           <p:cNvPicPr>
             <a:picLocks noChangeAspect="1"/>
           </p:cNvPicPr>
@@ -14875,9 +14683,9 @@
           </a:stretch>
         </p:blipFill>
         <p:spPr>
-          <a:xfrm flipH="1">
+          <a:xfrm>
             <a:off x="91440" y="3653028"/>
-            <a:ext cx="1498107" cy="1417320"/>
+            <a:ext cx="634959" cy="1417320"/>
           </a:xfrm>
           <a:prstGeom prst="rect">
             <a:avLst/>
@@ -14886,7 +14694,7 @@
       </p:pic>
       <p:pic>
         <p:nvPicPr>
-          <p:cNvPr id="21" name="Image 1" descr="camel">    </p:cNvPr>
+          <p:cNvPr id="21" name="Image 1" descr="bird">    </p:cNvPr>
           <p:cNvPicPr>
             <a:picLocks noChangeAspect="1"/>
           </p:cNvPicPr>
@@ -14900,32 +14708,8 @@
         </p:blipFill>
         <p:spPr>
           <a:xfrm>
-            <a:off x="7440564" y="3515868"/>
-            <a:ext cx="1611996" cy="1554480"/>
-          </a:xfrm>
-          <a:prstGeom prst="rect">
-            <a:avLst/>
-          </a:prstGeom>
-        </p:spPr>
-      </p:pic>
-      <p:pic>
-        <p:nvPicPr>
-          <p:cNvPr id="22" name="Image 2" descr="dove">    </p:cNvPr>
-          <p:cNvPicPr>
-            <a:picLocks noChangeAspect="1"/>
-          </p:cNvPicPr>
-          <p:nvPr/>
-        </p:nvPicPr>
-        <p:blipFill>
-          <a:blip r:embed="rId3"/>
-          <a:stretch>
-            <a:fillRect/>
-          </a:stretch>
-        </p:blipFill>
-        <p:spPr>
-          <a:xfrm>
-            <a:off x="5762915" y="45720"/>
-            <a:ext cx="546445" cy="548640"/>
+            <a:off x="7283562" y="3515868"/>
+            <a:ext cx="1768998" cy="1554480"/>
           </a:xfrm>
           <a:prstGeom prst="rect">
             <a:avLst/>
@@ -15931,7 +15715,7 @@
       </p:sp>
       <p:pic>
         <p:nvPicPr>
-          <p:cNvPr id="21" name="Image 0" descr="giraffe">    </p:cNvPr>
+          <p:cNvPr id="21" name="Image 0" descr="animal">    </p:cNvPr>
           <p:cNvPicPr>
             <a:picLocks noChangeAspect="1"/>
           </p:cNvPicPr>
@@ -15944,57 +15728,9 @@
           </a:stretch>
         </p:blipFill>
         <p:spPr>
-          <a:xfrm flipH="1">
-            <a:off x="91440" y="3881628"/>
-            <a:ext cx="1115019" cy="1188720"/>
-          </a:xfrm>
-          <a:prstGeom prst="rect">
-            <a:avLst/>
-          </a:prstGeom>
-        </p:spPr>
-      </p:pic>
-      <p:pic>
-        <p:nvPicPr>
-          <p:cNvPr id="22" name="Image 1" descr="owl">    </p:cNvPr>
-          <p:cNvPicPr>
-            <a:picLocks noChangeAspect="1"/>
-          </p:cNvPicPr>
-          <p:nvPr/>
-        </p:nvPicPr>
-        <p:blipFill>
-          <a:blip r:embed="rId2"/>
-          <a:stretch>
-            <a:fillRect/>
-          </a:stretch>
-        </p:blipFill>
-        <p:spPr>
-          <a:xfrm>
-            <a:off x="8333842" y="4155948"/>
-            <a:ext cx="718718" cy="914400"/>
-          </a:xfrm>
-          <a:prstGeom prst="rect">
-            <a:avLst/>
-          </a:prstGeom>
-        </p:spPr>
-      </p:pic>
-      <p:pic>
-        <p:nvPicPr>
-          <p:cNvPr id="23" name="Image 2" descr="honeybee">    </p:cNvPr>
-          <p:cNvPicPr>
-            <a:picLocks noChangeAspect="1"/>
-          </p:cNvPicPr>
-          <p:nvPr/>
-        </p:nvPicPr>
-        <p:blipFill>
-          <a:blip r:embed="rId3"/>
-          <a:stretch>
-            <a:fillRect/>
-          </a:stretch>
-        </p:blipFill>
-        <p:spPr>
-          <a:xfrm flipH="1">
-            <a:off x="1920240" y="45720"/>
-            <a:ext cx="825429" cy="777240"/>
+          <a:xfrm>
+            <a:off x="91440" y="3653028"/>
+            <a:ext cx="846140" cy="1417320"/>
           </a:xfrm>
           <a:prstGeom prst="rect">
             <a:avLst/>
@@ -17025,7 +16761,7 @@
       </p:sp>
       <p:pic>
         <p:nvPicPr>
-          <p:cNvPr id="22" name="Image 0" descr="goat">    </p:cNvPr>
+          <p:cNvPr id="22" name="Image 0" descr="kid">    </p:cNvPr>
           <p:cNvPicPr>
             <a:picLocks noChangeAspect="1"/>
           </p:cNvPicPr>
@@ -17040,7 +16776,7 @@
         <p:spPr>
           <a:xfrm>
             <a:off x="91440" y="3653028"/>
-            <a:ext cx="1517950" cy="1417320"/>
+            <a:ext cx="901416" cy="1417320"/>
           </a:xfrm>
           <a:prstGeom prst="rect">
             <a:avLst/>
@@ -17049,7 +16785,7 @@
       </p:pic>
       <p:pic>
         <p:nvPicPr>
-          <p:cNvPr id="23" name="Image 1" descr="swan">    </p:cNvPr>
+          <p:cNvPr id="23" name="Image 1" descr="kid">    </p:cNvPr>
           <p:cNvPicPr>
             <a:picLocks noChangeAspect="1"/>
           </p:cNvPicPr>
@@ -17063,32 +16799,8 @@
         </p:blipFill>
         <p:spPr>
           <a:xfrm>
-            <a:off x="7378385" y="3515868"/>
-            <a:ext cx="1674175" cy="1554480"/>
-          </a:xfrm>
-          <a:prstGeom prst="rect">
-            <a:avLst/>
-          </a:prstGeom>
-        </p:spPr>
-      </p:pic>
-      <p:pic>
-        <p:nvPicPr>
-          <p:cNvPr id="24" name="Image 2" descr="butterfly">    </p:cNvPr>
-          <p:cNvPicPr>
-            <a:picLocks noChangeAspect="1"/>
-          </p:cNvPicPr>
-          <p:nvPr/>
-        </p:nvPicPr>
-        <p:blipFill>
-          <a:blip r:embed="rId3"/>
-          <a:stretch>
-            <a:fillRect/>
-          </a:stretch>
-        </p:blipFill>
-        <p:spPr>
-          <a:xfrm>
-            <a:off x="4800600" y="45720"/>
-            <a:ext cx="777240" cy="777240"/>
+            <a:off x="8025049" y="3515868"/>
+            <a:ext cx="1027511" cy="1554480"/>
           </a:xfrm>
           <a:prstGeom prst="rect">
             <a:avLst/>
@@ -18119,7 +17831,7 @@
       </p:sp>
       <p:pic>
         <p:nvPicPr>
-          <p:cNvPr id="22" name="Image 0" descr="llama">    </p:cNvPr>
+          <p:cNvPr id="22" name="Image 0" descr="kid">    </p:cNvPr>
           <p:cNvPicPr>
             <a:picLocks noChangeAspect="1"/>
           </p:cNvPicPr>
@@ -18132,9 +17844,9 @@
           </a:stretch>
         </p:blipFill>
         <p:spPr>
-          <a:xfrm flipH="1">
+          <a:xfrm>
             <a:off x="91440" y="3653028"/>
-            <a:ext cx="1322360" cy="1417320"/>
+            <a:ext cx="690235" cy="1417320"/>
           </a:xfrm>
           <a:prstGeom prst="rect">
             <a:avLst/>
@@ -18143,7 +17855,7 @@
       </p:pic>
       <p:pic>
         <p:nvPicPr>
-          <p:cNvPr id="23" name="Image 1" descr="ewe">    </p:cNvPr>
+          <p:cNvPr id="23" name="Image 1" descr="kid">    </p:cNvPr>
           <p:cNvPicPr>
             <a:picLocks noChangeAspect="1"/>
           </p:cNvPicPr>
@@ -18157,32 +17869,8 @@
         </p:blipFill>
         <p:spPr>
           <a:xfrm>
-            <a:off x="7498080" y="3515868"/>
-            <a:ext cx="1554480" cy="1554480"/>
-          </a:xfrm>
-          <a:prstGeom prst="rect">
-            <a:avLst/>
-          </a:prstGeom>
-        </p:spPr>
-      </p:pic>
-      <p:pic>
-        <p:nvPicPr>
-          <p:cNvPr id="24" name="Image 2" descr="lady_beetle">    </p:cNvPr>
-          <p:cNvPicPr>
-            <a:picLocks noChangeAspect="1"/>
-          </p:cNvPicPr>
-          <p:nvPr/>
-        </p:nvPicPr>
-        <p:blipFill>
-          <a:blip r:embed="rId3"/>
-          <a:stretch>
-            <a:fillRect/>
-          </a:stretch>
-        </p:blipFill>
-        <p:spPr>
-          <a:xfrm>
-            <a:off x="4797491" y="45720"/>
-            <a:ext cx="780349" cy="777240"/>
+            <a:off x="8049920" y="3515868"/>
+            <a:ext cx="1002640" cy="1554480"/>
           </a:xfrm>
           <a:prstGeom prst="rect">
             <a:avLst/>
@@ -19173,7 +18861,7 @@
       </p:sp>
       <p:pic>
         <p:nvPicPr>
-          <p:cNvPr id="20" name="Image 0" descr="tropical_fish">    </p:cNvPr>
+          <p:cNvPr id="20" name="Image 0" descr="animal">    </p:cNvPr>
           <p:cNvPicPr>
             <a:picLocks noChangeAspect="1"/>
           </p:cNvPicPr>
@@ -19186,9 +18874,9 @@
           </a:stretch>
         </p:blipFill>
         <p:spPr>
-          <a:xfrm flipH="1">
+          <a:xfrm>
             <a:off x="91440" y="3653028"/>
-            <a:ext cx="1724878" cy="1417320"/>
+            <a:ext cx="1496690" cy="1417320"/>
           </a:xfrm>
           <a:prstGeom prst="rect">
             <a:avLst/>
@@ -19197,7 +18885,7 @@
       </p:pic>
       <p:pic>
         <p:nvPicPr>
-          <p:cNvPr id="21" name="Image 1" descr="duck">    </p:cNvPr>
+          <p:cNvPr id="21" name="Image 1" descr="sea">    </p:cNvPr>
           <p:cNvPicPr>
             <a:picLocks noChangeAspect="1"/>
           </p:cNvPicPr>
@@ -19211,32 +18899,8 @@
         </p:blipFill>
         <p:spPr>
           <a:xfrm>
-            <a:off x="7498080" y="3515868"/>
-            <a:ext cx="1554480" cy="1554480"/>
-          </a:xfrm>
-          <a:prstGeom prst="rect">
-            <a:avLst/>
-          </a:prstGeom>
-        </p:spPr>
-      </p:pic>
-      <p:pic>
-        <p:nvPicPr>
-          <p:cNvPr id="22" name="Image 2" descr="bird">    </p:cNvPr>
-          <p:cNvPicPr>
-            <a:picLocks noChangeAspect="1"/>
-          </p:cNvPicPr>
-          <p:nvPr/>
-        </p:nvPicPr>
-        <p:blipFill>
-          <a:blip r:embed="rId3"/>
-          <a:stretch>
-            <a:fillRect/>
-          </a:stretch>
-        </p:blipFill>
-        <p:spPr>
-          <a:xfrm flipH="1">
-            <a:off x="1920240" y="45720"/>
-            <a:ext cx="742264" cy="777240"/>
+            <a:off x="8245785" y="3515868"/>
+            <a:ext cx="806775" cy="1554480"/>
           </a:xfrm>
           <a:prstGeom prst="rect">
             <a:avLst/>
@@ -20417,7 +20081,7 @@
       </p:sp>
       <p:pic>
         <p:nvPicPr>
-          <p:cNvPr id="28" name="Image 0" descr="butterfly">    </p:cNvPr>
+          <p:cNvPr id="28" name="Image 0" descr="kid">    </p:cNvPr>
           <p:cNvPicPr>
             <a:picLocks noChangeAspect="1"/>
           </p:cNvPicPr>
@@ -20431,8 +20095,8 @@
         </p:blipFill>
         <p:spPr>
           <a:xfrm>
-            <a:off x="4800600" y="45720"/>
-            <a:ext cx="777240" cy="777240"/>
+            <a:off x="91440" y="2057400"/>
+            <a:ext cx="512430" cy="1097280"/>
           </a:xfrm>
           <a:prstGeom prst="rect">
             <a:avLst/>
@@ -21441,7 +21105,7 @@
       </p:sp>
       <p:pic>
         <p:nvPicPr>
-          <p:cNvPr id="22" name="Image 0" descr="ewe">    </p:cNvPr>
+          <p:cNvPr id="22" name="Image 0" descr="animal">    </p:cNvPr>
           <p:cNvPicPr>
             <a:picLocks noChangeAspect="1"/>
           </p:cNvPicPr>
@@ -21454,9 +21118,9 @@
           </a:stretch>
         </p:blipFill>
         <p:spPr>
-          <a:xfrm flipH="1">
-            <a:off x="91440" y="1828800"/>
-            <a:ext cx="1463040" cy="1463040"/>
+          <a:xfrm>
+            <a:off x="91440" y="1783080"/>
+            <a:ext cx="1751259" cy="1645920"/>
           </a:xfrm>
           <a:prstGeom prst="rect">
             <a:avLst/>
@@ -21465,7 +21129,7 @@
       </p:pic>
       <p:pic>
         <p:nvPicPr>
-          <p:cNvPr id="23" name="Image 1" descr="dog">    </p:cNvPr>
+          <p:cNvPr id="23" name="Image 1" descr="kid">    </p:cNvPr>
           <p:cNvPicPr>
             <a:picLocks noChangeAspect="1"/>
           </p:cNvPicPr>
@@ -21479,32 +21143,8 @@
         </p:blipFill>
         <p:spPr>
           <a:xfrm>
-            <a:off x="7413955" y="1828800"/>
-            <a:ext cx="1638605" cy="1463040"/>
-          </a:xfrm>
-          <a:prstGeom prst="rect">
-            <a:avLst/>
-          </a:prstGeom>
-        </p:spPr>
-      </p:pic>
-      <p:pic>
-        <p:nvPicPr>
-          <p:cNvPr id="24" name="Image 2" descr="dove">    </p:cNvPr>
-          <p:cNvPicPr>
-            <a:picLocks noChangeAspect="1"/>
-          </p:cNvPicPr>
-          <p:nvPr/>
-        </p:nvPicPr>
-        <p:blipFill>
-          <a:blip r:embed="rId3"/>
-          <a:stretch>
-            <a:fillRect/>
-          </a:stretch>
-        </p:blipFill>
-        <p:spPr>
-          <a:xfrm flipH="1">
-            <a:off x="2834640" y="45720"/>
-            <a:ext cx="774131" cy="777240"/>
+            <a:off x="8262518" y="1783080"/>
+            <a:ext cx="790042" cy="1645920"/>
           </a:xfrm>
           <a:prstGeom prst="rect">
             <a:avLst/>
@@ -22314,7 +21954,7 @@
       </p:sp>
       <p:pic>
         <p:nvPicPr>
-          <p:cNvPr id="17" name="Image 0" descr="horse">    </p:cNvPr>
+          <p:cNvPr id="17" name="Image 0" descr="kid">    </p:cNvPr>
           <p:cNvPicPr>
             <a:picLocks noChangeAspect="1"/>
           </p:cNvPicPr>
@@ -22327,9 +21967,9 @@
           </a:stretch>
         </p:blipFill>
         <p:spPr>
-          <a:xfrm flipH="1">
-            <a:off x="91440" y="1828800"/>
-            <a:ext cx="1463040" cy="1463040"/>
+          <a:xfrm>
+            <a:off x="91440" y="3241548"/>
+            <a:ext cx="832104" cy="1828800"/>
           </a:xfrm>
           <a:prstGeom prst="rect">
             <a:avLst/>
@@ -22338,7 +21978,7 @@
       </p:pic>
       <p:pic>
         <p:nvPicPr>
-          <p:cNvPr id="18" name="Image 1" descr="rooster">    </p:cNvPr>
+          <p:cNvPr id="18" name="Image 1" descr="bird">    </p:cNvPr>
           <p:cNvPicPr>
             <a:picLocks noChangeAspect="1"/>
           </p:cNvPicPr>
@@ -22352,32 +21992,8 @@
         </p:blipFill>
         <p:spPr>
           <a:xfrm>
-            <a:off x="7642189" y="1828800"/>
-            <a:ext cx="1410371" cy="1463040"/>
-          </a:xfrm>
-          <a:prstGeom prst="rect">
-            <a:avLst/>
-          </a:prstGeom>
-        </p:spPr>
-      </p:pic>
-      <p:pic>
-        <p:nvPicPr>
-          <p:cNvPr id="19" name="Image 2" descr="honeybee">    </p:cNvPr>
-          <p:cNvPicPr>
-            <a:picLocks noChangeAspect="1"/>
-          </p:cNvPicPr>
-          <p:nvPr/>
-        </p:nvPicPr>
-        <p:blipFill>
-          <a:blip r:embed="rId3"/>
-          <a:stretch>
-            <a:fillRect/>
-          </a:stretch>
-        </p:blipFill>
-        <p:spPr>
-          <a:xfrm>
-            <a:off x="5775259" y="45720"/>
-            <a:ext cx="534101" cy="502920"/>
+            <a:off x="6196066" y="3287268"/>
+            <a:ext cx="2856494" cy="1783080"/>
           </a:xfrm>
           <a:prstGeom prst="rect">
             <a:avLst/>
@@ -23212,7 +22828,7 @@
       </p:sp>
       <p:pic>
         <p:nvPicPr>
-          <p:cNvPr id="18" name="Image 0" descr="penguin">    </p:cNvPr>
+          <p:cNvPr id="18" name="Image 0" descr="animal">    </p:cNvPr>
           <p:cNvPicPr>
             <a:picLocks noChangeAspect="1"/>
           </p:cNvPicPr>
@@ -23226,8 +22842,8 @@
         </p:blipFill>
         <p:spPr>
           <a:xfrm>
-            <a:off x="91440" y="1828800"/>
-            <a:ext cx="1479133" cy="1463040"/>
+            <a:off x="91440" y="1783080"/>
+            <a:ext cx="1591605" cy="1645920"/>
           </a:xfrm>
           <a:prstGeom prst="rect">
             <a:avLst/>
@@ -23236,7 +22852,7 @@
       </p:pic>
       <p:pic>
         <p:nvPicPr>
-          <p:cNvPr id="19" name="Image 1" descr="hedgehog">    </p:cNvPr>
+          <p:cNvPr id="19" name="Image 1" descr="animal">    </p:cNvPr>
           <p:cNvPicPr>
             <a:picLocks noChangeAspect="1"/>
           </p:cNvPicPr>
@@ -23250,32 +22866,8 @@
         </p:blipFill>
         <p:spPr>
           <a:xfrm>
-            <a:off x="7147682" y="1828800"/>
-            <a:ext cx="1904878" cy="1463040"/>
-          </a:xfrm>
-          <a:prstGeom prst="rect">
-            <a:avLst/>
-          </a:prstGeom>
-        </p:spPr>
-      </p:pic>
-      <p:pic>
-        <p:nvPicPr>
-          <p:cNvPr id="20" name="Image 2" descr="lady_beetle">    </p:cNvPr>
-          <p:cNvPicPr>
-            <a:picLocks noChangeAspect="1"/>
-          </p:cNvPicPr>
-          <p:nvPr/>
-        </p:nvPicPr>
-        <p:blipFill>
-          <a:blip r:embed="rId3"/>
-          <a:stretch>
-            <a:fillRect/>
-          </a:stretch>
-        </p:blipFill>
-        <p:spPr>
-          <a:xfrm>
-            <a:off x="1920240" y="45720"/>
-            <a:ext cx="780349" cy="777240"/>
+            <a:off x="7378659" y="1783080"/>
+            <a:ext cx="1673901" cy="1645920"/>
           </a:xfrm>
           <a:prstGeom prst="rect">
             <a:avLst/>
@@ -24135,7 +23727,7 @@
       </p:sp>
       <p:pic>
         <p:nvPicPr>
-          <p:cNvPr id="19" name="Image 0" descr="baby_chick">    </p:cNvPr>
+          <p:cNvPr id="19" name="Image 0" descr="kid">    </p:cNvPr>
           <p:cNvPicPr>
             <a:picLocks noChangeAspect="1"/>
           </p:cNvPicPr>
@@ -24148,9 +23740,9 @@
           </a:stretch>
         </p:blipFill>
         <p:spPr>
-          <a:xfrm flipH="1">
-            <a:off x="91440" y="1828800"/>
-            <a:ext cx="1575694" cy="1463040"/>
+          <a:xfrm>
+            <a:off x="91440" y="3241548"/>
+            <a:ext cx="899770" cy="1828800"/>
           </a:xfrm>
           <a:prstGeom prst="rect">
             <a:avLst/>
@@ -24159,7 +23751,7 @@
       </p:pic>
       <p:pic>
         <p:nvPicPr>
-          <p:cNvPr id="20" name="Image 1" descr="chipmunk">    </p:cNvPr>
+          <p:cNvPr id="20" name="Image 1" descr="kid">    </p:cNvPr>
           <p:cNvPicPr>
             <a:picLocks noChangeAspect="1"/>
           </p:cNvPicPr>
@@ -24173,32 +23765,8 @@
         </p:blipFill>
         <p:spPr>
           <a:xfrm>
-            <a:off x="7535388" y="1828800"/>
-            <a:ext cx="1517172" cy="1463040"/>
-          </a:xfrm>
-          <a:prstGeom prst="rect">
-            <a:avLst/>
-          </a:prstGeom>
-        </p:spPr>
-      </p:pic>
-      <p:pic>
-        <p:nvPicPr>
-          <p:cNvPr id="21" name="Image 2" descr="bird">    </p:cNvPr>
-          <p:cNvPicPr>
-            <a:picLocks noChangeAspect="1"/>
-          </p:cNvPicPr>
-          <p:nvPr/>
-        </p:nvPicPr>
-        <p:blipFill>
-          <a:blip r:embed="rId3"/>
-          <a:stretch>
-            <a:fillRect/>
-          </a:stretch>
-        </p:blipFill>
-        <p:spPr>
-          <a:xfrm>
-            <a:off x="4835576" y="45720"/>
-            <a:ext cx="742264" cy="777240"/>
+            <a:off x="7741310" y="3241548"/>
+            <a:ext cx="1311250" cy="1828800"/>
           </a:xfrm>
           <a:prstGeom prst="rect">
             <a:avLst/>
@@ -25117,7 +24685,7 @@
       </p:sp>
       <p:pic>
         <p:nvPicPr>
-          <p:cNvPr id="20" name="Image 0" descr="swan">    </p:cNvPr>
+          <p:cNvPr id="20" name="Image 0" descr="animal">    </p:cNvPr>
           <p:cNvPicPr>
             <a:picLocks noChangeAspect="1"/>
           </p:cNvPicPr>
@@ -25130,9 +24698,9 @@
           </a:stretch>
         </p:blipFill>
         <p:spPr>
-          <a:xfrm flipH="1">
+          <a:xfrm>
             <a:off x="91440" y="3653028"/>
-            <a:ext cx="1526454" cy="1417320"/>
+            <a:ext cx="2371176" cy="1417320"/>
           </a:xfrm>
           <a:prstGeom prst="rect">
             <a:avLst/>
@@ -25141,7 +24709,7 @@
       </p:pic>
       <p:pic>
         <p:nvPicPr>
-          <p:cNvPr id="21" name="Image 1" descr="turtle">    </p:cNvPr>
+          <p:cNvPr id="21" name="Image 1" descr="sea">    </p:cNvPr>
           <p:cNvPicPr>
             <a:picLocks noChangeAspect="1"/>
           </p:cNvPicPr>
@@ -25155,32 +24723,8 @@
         </p:blipFill>
         <p:spPr>
           <a:xfrm>
-            <a:off x="6546738" y="3515868"/>
-            <a:ext cx="2505822" cy="1554480"/>
-          </a:xfrm>
-          <a:prstGeom prst="rect">
-            <a:avLst/>
-          </a:prstGeom>
-        </p:spPr>
-      </p:pic>
-      <p:pic>
-        <p:nvPicPr>
-          <p:cNvPr id="22" name="Image 2" descr="dove">    </p:cNvPr>
-          <p:cNvPicPr>
-            <a:picLocks noChangeAspect="1"/>
-          </p:cNvPicPr>
-          <p:nvPr/>
-        </p:nvPicPr>
-        <p:blipFill>
-          <a:blip r:embed="rId3"/>
-          <a:stretch>
-            <a:fillRect/>
-          </a:stretch>
-        </p:blipFill>
-        <p:spPr>
-          <a:xfrm flipH="1">
-            <a:off x="1920240" y="45720"/>
-            <a:ext cx="774131" cy="777240"/>
+            <a:off x="8245785" y="3515868"/>
+            <a:ext cx="806775" cy="1554480"/>
           </a:xfrm>
           <a:prstGeom prst="rect">
             <a:avLst/>
@@ -26361,7 +25905,7 @@
       </p:sp>
       <p:pic>
         <p:nvPicPr>
-          <p:cNvPr id="28" name="Image 0" descr="honeybee">    </p:cNvPr>
+          <p:cNvPr id="28" name="Image 0" descr="kid">    </p:cNvPr>
           <p:cNvPicPr>
             <a:picLocks noChangeAspect="1"/>
           </p:cNvPicPr>
@@ -26375,8 +25919,8 @@
         </p:blipFill>
         <p:spPr>
           <a:xfrm>
-            <a:off x="4752411" y="45720"/>
-            <a:ext cx="825429" cy="777240"/>
+            <a:off x="91440" y="2080260"/>
+            <a:ext cx="520522" cy="1051560"/>
           </a:xfrm>
           <a:prstGeom prst="rect">
             <a:avLst/>
@@ -27484,7 +27028,7 @@
       </p:sp>
       <p:pic>
         <p:nvPicPr>
-          <p:cNvPr id="25" name="Image 0" descr="chipmunk">    </p:cNvPr>
+          <p:cNvPr id="25" name="Image 0" descr="kid">    </p:cNvPr>
           <p:cNvPicPr>
             <a:picLocks noChangeAspect="1"/>
           </p:cNvPicPr>
@@ -27497,33 +27041,9 @@
           </a:stretch>
         </p:blipFill>
         <p:spPr>
-          <a:xfrm flipH="1">
-            <a:off x="91440" y="4201668"/>
-            <a:ext cx="900821" cy="868680"/>
-          </a:xfrm>
-          <a:prstGeom prst="rect">
-            <a:avLst/>
-          </a:prstGeom>
-        </p:spPr>
-      </p:pic>
-      <p:pic>
-        <p:nvPicPr>
-          <p:cNvPr id="26" name="Image 1" descr="lady_beetle">    </p:cNvPr>
-          <p:cNvPicPr>
-            <a:picLocks noChangeAspect="1"/>
-          </p:cNvPicPr>
-          <p:nvPr/>
-        </p:nvPicPr>
-        <p:blipFill>
-          <a:blip r:embed="rId2"/>
-          <a:stretch>
-            <a:fillRect/>
-          </a:stretch>
-        </p:blipFill>
-        <p:spPr>
-          <a:xfrm>
-            <a:off x="2834640" y="45720"/>
-            <a:ext cx="780349" cy="777240"/>
+          <a:xfrm>
+            <a:off x="8479048" y="3790188"/>
+            <a:ext cx="573512" cy="1280160"/>
           </a:xfrm>
           <a:prstGeom prst="rect">
             <a:avLst/>
@@ -28504,7 +28024,7 @@
       </p:sp>
       <p:pic>
         <p:nvPicPr>
-          <p:cNvPr id="20" name="Image 0" descr="flamingo">    </p:cNvPr>
+          <p:cNvPr id="20" name="Image 0" descr="kid">    </p:cNvPr>
           <p:cNvPicPr>
             <a:picLocks noChangeAspect="1"/>
           </p:cNvPicPr>
@@ -28517,9 +28037,9 @@
           </a:stretch>
         </p:blipFill>
         <p:spPr>
-          <a:xfrm flipH="1">
+          <a:xfrm>
             <a:off x="91440" y="3653028"/>
-            <a:ext cx="1106927" cy="1417320"/>
+            <a:ext cx="729920" cy="1417320"/>
           </a:xfrm>
           <a:prstGeom prst="rect">
             <a:avLst/>
@@ -28528,7 +28048,7 @@
       </p:pic>
       <p:pic>
         <p:nvPicPr>
-          <p:cNvPr id="21" name="Image 1" descr="hatching_chick">    </p:cNvPr>
+          <p:cNvPr id="21" name="Image 1" descr="bird">    </p:cNvPr>
           <p:cNvPicPr>
             <a:picLocks noChangeAspect="1"/>
           </p:cNvPicPr>
@@ -28542,32 +28062,8 @@
         </p:blipFill>
         <p:spPr>
           <a:xfrm>
-            <a:off x="7498080" y="3515868"/>
-            <a:ext cx="1554480" cy="1554480"/>
-          </a:xfrm>
-          <a:prstGeom prst="rect">
-            <a:avLst/>
-          </a:prstGeom>
-        </p:spPr>
-      </p:pic>
-      <p:pic>
-        <p:nvPicPr>
-          <p:cNvPr id="22" name="Image 2" descr="bird">    </p:cNvPr>
-          <p:cNvPicPr>
-            <a:picLocks noChangeAspect="1"/>
-          </p:cNvPicPr>
-          <p:nvPr/>
-        </p:nvPicPr>
-        <p:blipFill>
-          <a:blip r:embed="rId3"/>
-          <a:stretch>
-            <a:fillRect/>
-          </a:stretch>
-        </p:blipFill>
-        <p:spPr>
-          <a:xfrm>
-            <a:off x="5785409" y="45720"/>
-            <a:ext cx="523951" cy="548640"/>
+            <a:off x="7903799" y="3515868"/>
+            <a:ext cx="1148761" cy="1554480"/>
           </a:xfrm>
           <a:prstGeom prst="rect">
             <a:avLst/>
@@ -29573,7 +29069,7 @@
       </p:sp>
       <p:pic>
         <p:nvPicPr>
-          <p:cNvPr id="21" name="Image 0" descr="kangaroo">    </p:cNvPr>
+          <p:cNvPr id="21" name="Image 0" descr="animal">    </p:cNvPr>
           <p:cNvPicPr>
             <a:picLocks noChangeAspect="1"/>
           </p:cNvPicPr>
@@ -29587,56 +29083,8 @@
         </p:blipFill>
         <p:spPr>
           <a:xfrm>
-            <a:off x="91440" y="4064508"/>
-            <a:ext cx="1078260" cy="1005840"/>
-          </a:xfrm>
-          <a:prstGeom prst="rect">
-            <a:avLst/>
-          </a:prstGeom>
-        </p:spPr>
-      </p:pic>
-      <p:pic>
-        <p:nvPicPr>
-          <p:cNvPr id="22" name="Image 1" descr="cat">    </p:cNvPr>
-          <p:cNvPicPr>
-            <a:picLocks noChangeAspect="1"/>
-          </p:cNvPicPr>
-          <p:nvPr/>
-        </p:nvPicPr>
-        <p:blipFill>
-          <a:blip r:embed="rId2"/>
-          <a:stretch>
-            <a:fillRect/>
-          </a:stretch>
-        </p:blipFill>
-        <p:spPr>
-          <a:xfrm>
-            <a:off x="8341385" y="4384548"/>
-            <a:ext cx="711175" cy="685800"/>
-          </a:xfrm>
-          <a:prstGeom prst="rect">
-            <a:avLst/>
-          </a:prstGeom>
-        </p:spPr>
-      </p:pic>
-      <p:pic>
-        <p:nvPicPr>
-          <p:cNvPr id="23" name="Image 2" descr="butterfly">    </p:cNvPr>
-          <p:cNvPicPr>
-            <a:picLocks noChangeAspect="1"/>
-          </p:cNvPicPr>
-          <p:nvPr/>
-        </p:nvPicPr>
-        <p:blipFill>
-          <a:blip r:embed="rId3"/>
-          <a:stretch>
-            <a:fillRect/>
-          </a:stretch>
-        </p:blipFill>
-        <p:spPr>
-          <a:xfrm>
-            <a:off x="1920240" y="45720"/>
-            <a:ext cx="777240" cy="777240"/>
+            <a:off x="91440" y="3653028"/>
+            <a:ext cx="1019053" cy="1417320"/>
           </a:xfrm>
           <a:prstGeom prst="rect">
             <a:avLst/>
@@ -30667,7 +30115,7 @@
       </p:sp>
       <p:pic>
         <p:nvPicPr>
-          <p:cNvPr id="22" name="Image 0" descr="rabbit">    </p:cNvPr>
+          <p:cNvPr id="22" name="Image 0" descr="kid">    </p:cNvPr>
           <p:cNvPicPr>
             <a:picLocks noChangeAspect="1"/>
           </p:cNvPicPr>
@@ -30680,9 +30128,9 @@
           </a:stretch>
         </p:blipFill>
         <p:spPr>
-          <a:xfrm flipH="1">
+          <a:xfrm>
             <a:off x="91440" y="3653028"/>
-            <a:ext cx="1422989" cy="1417320"/>
+            <a:ext cx="732754" cy="1417320"/>
           </a:xfrm>
           <a:prstGeom prst="rect">
             <a:avLst/>
@@ -30691,7 +30139,7 @@
       </p:pic>
       <p:pic>
         <p:nvPicPr>
-          <p:cNvPr id="23" name="Image 1" descr="parrot">    </p:cNvPr>
+          <p:cNvPr id="23" name="Image 1" descr="kid">    </p:cNvPr>
           <p:cNvPicPr>
             <a:picLocks noChangeAspect="1"/>
           </p:cNvPicPr>
@@ -30705,32 +30153,8 @@
         </p:blipFill>
         <p:spPr>
           <a:xfrm>
-            <a:off x="7712598" y="3515868"/>
-            <a:ext cx="1339962" cy="1554480"/>
-          </a:xfrm>
-          <a:prstGeom prst="rect">
-            <a:avLst/>
-          </a:prstGeom>
-        </p:spPr>
-      </p:pic>
-      <p:pic>
-        <p:nvPicPr>
-          <p:cNvPr id="24" name="Image 2" descr="dove">    </p:cNvPr>
-          <p:cNvPicPr>
-            <a:picLocks noChangeAspect="1"/>
-          </p:cNvPicPr>
-          <p:nvPr/>
-        </p:nvPicPr>
-        <p:blipFill>
-          <a:blip r:embed="rId3"/>
-          <a:stretch>
-            <a:fillRect/>
-          </a:stretch>
-        </p:blipFill>
-        <p:spPr>
-          <a:xfrm>
-            <a:off x="4803709" y="45720"/>
-            <a:ext cx="774131" cy="777240"/>
+            <a:off x="7965978" y="3515868"/>
+            <a:ext cx="1086582" cy="1554480"/>
           </a:xfrm>
           <a:prstGeom prst="rect">
             <a:avLst/>
@@ -31849,7 +31273,7 @@
       </p:sp>
       <p:pic>
         <p:nvPicPr>
-          <p:cNvPr id="24" name="Image 0" descr="dolphin">    </p:cNvPr>
+          <p:cNvPr id="24" name="Image 0" descr="animal">    </p:cNvPr>
           <p:cNvPicPr>
             <a:picLocks noChangeAspect="1"/>
           </p:cNvPicPr>
@@ -31862,9 +31286,9 @@
           </a:stretch>
         </p:blipFill>
         <p:spPr>
-          <a:xfrm flipH="1">
+          <a:xfrm>
             <a:off x="91440" y="3561588"/>
-            <a:ext cx="1185885" cy="1508760"/>
+            <a:ext cx="1041044" cy="1508760"/>
           </a:xfrm>
           <a:prstGeom prst="rect">
             <a:avLst/>
@@ -31873,7 +31297,7 @@
       </p:pic>
       <p:pic>
         <p:nvPicPr>
-          <p:cNvPr id="25" name="Image 1" descr="crab">    </p:cNvPr>
+          <p:cNvPr id="25" name="Image 1" descr="sea">    </p:cNvPr>
           <p:cNvPicPr>
             <a:picLocks noChangeAspect="1"/>
           </p:cNvPicPr>
@@ -31887,32 +31311,8 @@
         </p:blipFill>
         <p:spPr>
           <a:xfrm>
-            <a:off x="7106717" y="3332988"/>
-            <a:ext cx="1945843" cy="1737360"/>
-          </a:xfrm>
-          <a:prstGeom prst="rect">
-            <a:avLst/>
-          </a:prstGeom>
-        </p:spPr>
-      </p:pic>
-      <p:pic>
-        <p:nvPicPr>
-          <p:cNvPr id="26" name="Image 2" descr="honeybee">    </p:cNvPr>
-          <p:cNvPicPr>
-            <a:picLocks noChangeAspect="1"/>
-          </p:cNvPicPr>
-          <p:nvPr/>
-        </p:nvPicPr>
-        <p:blipFill>
-          <a:blip r:embed="rId3"/>
-          <a:stretch>
-            <a:fillRect/>
-          </a:stretch>
-        </p:blipFill>
-        <p:spPr>
-          <a:xfrm flipH="1">
-            <a:off x="1920240" y="45720"/>
-            <a:ext cx="825429" cy="777240"/>
+            <a:off x="6463894" y="3332988"/>
+            <a:ext cx="2588666" cy="1737360"/>
           </a:xfrm>
           <a:prstGeom prst="rect">
             <a:avLst/>

--- a/fathah-plus/01-alif.pptx
+++ b/fathah-plus/01-alif.pptx
@@ -3444,8 +3444,8 @@
         </p:blipFill>
         <p:spPr>
           <a:xfrm>
-            <a:off x="91440" y="1783080"/>
-            <a:ext cx="1767718" cy="1645920"/>
+            <a:off x="91440" y="1965960"/>
+            <a:ext cx="1199510" cy="1280160"/>
           </a:xfrm>
           <a:prstGeom prst="rect">
             <a:avLst/>
@@ -3454,7 +3454,7 @@
       </p:pic>
       <p:pic>
         <p:nvPicPr>
-          <p:cNvPr id="15" name="Image 1" descr="animal">    </p:cNvPr>
+          <p:cNvPr id="15" name="Image 1" descr="bird">    </p:cNvPr>
           <p:cNvPicPr>
             <a:picLocks noChangeAspect="1"/>
           </p:cNvPicPr>
@@ -3468,8 +3468,8 @@
         </p:blipFill>
         <p:spPr>
           <a:xfrm>
-            <a:off x="6939199" y="1783080"/>
-            <a:ext cx="2113361" cy="1645920"/>
+            <a:off x="7675108" y="1965960"/>
+            <a:ext cx="1377452" cy="1280160"/>
           </a:xfrm>
           <a:prstGeom prst="rect">
             <a:avLst/>
@@ -5906,8 +5906,8 @@
         </p:blipFill>
         <p:spPr>
           <a:xfrm>
-            <a:off x="91440" y="4110228"/>
-            <a:ext cx="931316" cy="960120"/>
+            <a:off x="91440" y="4018788"/>
+            <a:ext cx="906445" cy="1051560"/>
           </a:xfrm>
           <a:prstGeom prst="rect">
             <a:avLst/>
@@ -5930,8 +5930,8 @@
         </p:blipFill>
         <p:spPr>
           <a:xfrm>
-            <a:off x="8467344" y="3927348"/>
-            <a:ext cx="585216" cy="1143000"/>
+            <a:off x="8486729" y="3881628"/>
+            <a:ext cx="565831" cy="1188720"/>
           </a:xfrm>
           <a:prstGeom prst="rect">
             <a:avLst/>
@@ -7217,7 +7217,7 @@
         <p:spPr>
           <a:xfrm>
             <a:off x="91440" y="3561588"/>
-            <a:ext cx="793608" cy="1508760"/>
+            <a:ext cx="792099" cy="1508760"/>
           </a:xfrm>
           <a:prstGeom prst="rect">
             <a:avLst/>
@@ -7240,8 +7240,8 @@
         </p:blipFill>
         <p:spPr>
           <a:xfrm>
-            <a:off x="7492411" y="3332988"/>
-            <a:ext cx="1560149" cy="1737360"/>
+            <a:off x="7430643" y="3561588"/>
+            <a:ext cx="1621917" cy="1508760"/>
           </a:xfrm>
           <a:prstGeom prst="rect">
             <a:avLst/>
@@ -8535,6 +8535,30 @@
           </a:p>
         </p:txBody>
       </p:sp>
+      <p:pic>
+        <p:nvPicPr>
+          <p:cNvPr id="25" name="Image 0" descr="animal">    </p:cNvPr>
+          <p:cNvPicPr>
+            <a:picLocks noChangeAspect="1"/>
+          </p:cNvPicPr>
+          <p:nvPr/>
+        </p:nvPicPr>
+        <p:blipFill>
+          <a:blip r:embed="rId1"/>
+          <a:stretch>
+            <a:fillRect/>
+          </a:stretch>
+        </p:blipFill>
+        <p:spPr>
+          <a:xfrm>
+            <a:off x="91440" y="3744468"/>
+            <a:ext cx="1081918" cy="1325880"/>
+          </a:xfrm>
+          <a:prstGeom prst="rect">
+            <a:avLst/>
+          </a:prstGeom>
+        </p:spPr>
+      </p:pic>
     </p:spTree>
   </p:cSld>
   <p:clrMapOvr>
@@ -9864,7 +9888,7 @@
         <p:spPr>
           <a:xfrm>
             <a:off x="91440" y="3561588"/>
-            <a:ext cx="716661" cy="1508760"/>
+            <a:ext cx="777011" cy="1508760"/>
           </a:xfrm>
           <a:prstGeom prst="rect">
             <a:avLst/>
@@ -9887,8 +9911,8 @@
         </p:blipFill>
         <p:spPr>
           <a:xfrm>
-            <a:off x="8055315" y="3332988"/>
-            <a:ext cx="997245" cy="1737360"/>
+            <a:off x="8010144" y="3332988"/>
+            <a:ext cx="1042416" cy="1737360"/>
           </a:xfrm>
           <a:prstGeom prst="rect">
             <a:avLst/>
@@ -11183,8 +11207,8 @@
         </p:blipFill>
         <p:spPr>
           <a:xfrm>
-            <a:off x="91440" y="3561588"/>
-            <a:ext cx="1391077" cy="1508760"/>
+            <a:off x="91440" y="3790188"/>
+            <a:ext cx="1099657" cy="1280160"/>
           </a:xfrm>
           <a:prstGeom prst="rect">
             <a:avLst/>
@@ -11207,8 +11231,8 @@
         </p:blipFill>
         <p:spPr>
           <a:xfrm>
-            <a:off x="6974677" y="3332988"/>
-            <a:ext cx="2077883" cy="1737360"/>
+            <a:off x="8466521" y="3881628"/>
+            <a:ext cx="586039" cy="1188720"/>
           </a:xfrm>
           <a:prstGeom prst="rect">
             <a:avLst/>
@@ -12565,8 +12589,8 @@
         </p:blipFill>
         <p:spPr>
           <a:xfrm>
-            <a:off x="91440" y="2080260"/>
-            <a:ext cx="517368" cy="1051560"/>
+            <a:off x="91440" y="2057400"/>
+            <a:ext cx="516819" cy="1097280"/>
           </a:xfrm>
           <a:prstGeom prst="rect">
             <a:avLst/>
@@ -13688,8 +13712,8 @@
         </p:blipFill>
         <p:spPr>
           <a:xfrm>
-            <a:off x="8490295" y="4064508"/>
-            <a:ext cx="562265" cy="1005840"/>
+            <a:off x="8469173" y="4064508"/>
+            <a:ext cx="583387" cy="1005840"/>
           </a:xfrm>
           <a:prstGeom prst="rect">
             <a:avLst/>
@@ -14685,7 +14709,7 @@
         <p:spPr>
           <a:xfrm>
             <a:off x="91440" y="3653028"/>
-            <a:ext cx="634959" cy="1417320"/>
+            <a:ext cx="681731" cy="1417320"/>
           </a:xfrm>
           <a:prstGeom prst="rect">
             <a:avLst/>
@@ -14708,8 +14732,8 @@
         </p:blipFill>
         <p:spPr>
           <a:xfrm>
-            <a:off x="7283562" y="3515868"/>
-            <a:ext cx="1768998" cy="1554480"/>
+            <a:off x="7879842" y="3698748"/>
+            <a:ext cx="1172718" cy="1371600"/>
           </a:xfrm>
           <a:prstGeom prst="rect">
             <a:avLst/>
@@ -15713,30 +15737,6 @@
           </a:p>
         </p:txBody>
       </p:sp>
-      <p:pic>
-        <p:nvPicPr>
-          <p:cNvPr id="21" name="Image 0" descr="animal">    </p:cNvPr>
-          <p:cNvPicPr>
-            <a:picLocks noChangeAspect="1"/>
-          </p:cNvPicPr>
-          <p:nvPr/>
-        </p:nvPicPr>
-        <p:blipFill>
-          <a:blip r:embed="rId1"/>
-          <a:stretch>
-            <a:fillRect/>
-          </a:stretch>
-        </p:blipFill>
-        <p:spPr>
-          <a:xfrm>
-            <a:off x="91440" y="3653028"/>
-            <a:ext cx="846140" cy="1417320"/>
-          </a:xfrm>
-          <a:prstGeom prst="rect">
-            <a:avLst/>
-          </a:prstGeom>
-        </p:spPr>
-      </p:pic>
     </p:spTree>
   </p:cSld>
   <p:clrMapOvr>
@@ -16776,7 +16776,7 @@
         <p:spPr>
           <a:xfrm>
             <a:off x="91440" y="3653028"/>
-            <a:ext cx="901416" cy="1417320"/>
+            <a:ext cx="934014" cy="1417320"/>
           </a:xfrm>
           <a:prstGeom prst="rect">
             <a:avLst/>
@@ -16799,8 +16799,8 @@
         </p:blipFill>
         <p:spPr>
           <a:xfrm>
-            <a:off x="8025049" y="3515868"/>
-            <a:ext cx="1027511" cy="1554480"/>
+            <a:off x="8015722" y="3515868"/>
+            <a:ext cx="1036838" cy="1554480"/>
           </a:xfrm>
           <a:prstGeom prst="rect">
             <a:avLst/>
@@ -17846,7 +17846,7 @@
         <p:spPr>
           <a:xfrm>
             <a:off x="91440" y="3653028"/>
-            <a:ext cx="690235" cy="1417320"/>
+            <a:ext cx="687400" cy="1417320"/>
           </a:xfrm>
           <a:prstGeom prst="rect">
             <a:avLst/>
@@ -17869,8 +17869,8 @@
         </p:blipFill>
         <p:spPr>
           <a:xfrm>
-            <a:off x="8049920" y="3515868"/>
-            <a:ext cx="1002640" cy="1554480"/>
+            <a:off x="7981523" y="3515868"/>
+            <a:ext cx="1071037" cy="1554480"/>
           </a:xfrm>
           <a:prstGeom prst="rect">
             <a:avLst/>
@@ -18876,7 +18876,7 @@
         <p:spPr>
           <a:xfrm>
             <a:off x="91440" y="3653028"/>
-            <a:ext cx="1496690" cy="1417320"/>
+            <a:ext cx="1267084" cy="1417320"/>
           </a:xfrm>
           <a:prstGeom prst="rect">
             <a:avLst/>
@@ -18899,8 +18899,8 @@
         </p:blipFill>
         <p:spPr>
           <a:xfrm>
-            <a:off x="8245785" y="3515868"/>
-            <a:ext cx="806775" cy="1554480"/>
+            <a:off x="7738110" y="4018788"/>
+            <a:ext cx="1314450" cy="1051560"/>
           </a:xfrm>
           <a:prstGeom prst="rect">
             <a:avLst/>
@@ -20095,8 +20095,8 @@
         </p:blipFill>
         <p:spPr>
           <a:xfrm>
-            <a:off x="91440" y="2057400"/>
-            <a:ext cx="512430" cy="1097280"/>
+            <a:off x="91440" y="2080260"/>
+            <a:ext cx="515264" cy="1051560"/>
           </a:xfrm>
           <a:prstGeom prst="rect">
             <a:avLst/>
@@ -21119,8 +21119,8 @@
         </p:blipFill>
         <p:spPr>
           <a:xfrm>
-            <a:off x="91440" y="1783080"/>
-            <a:ext cx="1751259" cy="1645920"/>
+            <a:off x="91440" y="1920240"/>
+            <a:ext cx="1012241" cy="1371600"/>
           </a:xfrm>
           <a:prstGeom prst="rect">
             <a:avLst/>
@@ -21143,8 +21143,8 @@
         </p:blipFill>
         <p:spPr>
           <a:xfrm>
-            <a:off x="8262518" y="1783080"/>
-            <a:ext cx="790042" cy="1645920"/>
+            <a:off x="8260872" y="1783080"/>
+            <a:ext cx="791688" cy="1645920"/>
           </a:xfrm>
           <a:prstGeom prst="rect">
             <a:avLst/>
@@ -21968,8 +21968,8 @@
         </p:blipFill>
         <p:spPr>
           <a:xfrm>
-            <a:off x="91440" y="3241548"/>
-            <a:ext cx="832104" cy="1828800"/>
+            <a:off x="91440" y="3332988"/>
+            <a:ext cx="778337" cy="1737360"/>
           </a:xfrm>
           <a:prstGeom prst="rect">
             <a:avLst/>
@@ -21992,8 +21992,8 @@
         </p:blipFill>
         <p:spPr>
           <a:xfrm>
-            <a:off x="6196066" y="3287268"/>
-            <a:ext cx="2856494" cy="1783080"/>
+            <a:off x="7391461" y="1897380"/>
+            <a:ext cx="1661099" cy="1417320"/>
           </a:xfrm>
           <a:prstGeom prst="rect">
             <a:avLst/>
@@ -22842,8 +22842,8 @@
         </p:blipFill>
         <p:spPr>
           <a:xfrm>
-            <a:off x="91440" y="1783080"/>
-            <a:ext cx="1591605" cy="1645920"/>
+            <a:off x="91440" y="1943100"/>
+            <a:ext cx="1422669" cy="1325880"/>
           </a:xfrm>
           <a:prstGeom prst="rect">
             <a:avLst/>
@@ -22852,7 +22852,7 @@
       </p:pic>
       <p:pic>
         <p:nvPicPr>
-          <p:cNvPr id="19" name="Image 1" descr="animal">    </p:cNvPr>
+          <p:cNvPr id="19" name="Image 1" descr="bird">    </p:cNvPr>
           <p:cNvPicPr>
             <a:picLocks noChangeAspect="1"/>
           </p:cNvPicPr>
@@ -22866,8 +22866,8 @@
         </p:blipFill>
         <p:spPr>
           <a:xfrm>
-            <a:off x="7378659" y="1783080"/>
-            <a:ext cx="1673901" cy="1645920"/>
+            <a:off x="7965476" y="1897380"/>
+            <a:ext cx="1087084" cy="1417320"/>
           </a:xfrm>
           <a:prstGeom prst="rect">
             <a:avLst/>
@@ -23741,8 +23741,8 @@
         </p:blipFill>
         <p:spPr>
           <a:xfrm>
-            <a:off x="91440" y="3241548"/>
-            <a:ext cx="899770" cy="1828800"/>
+            <a:off x="91440" y="3332988"/>
+            <a:ext cx="826983" cy="1737360"/>
           </a:xfrm>
           <a:prstGeom prst="rect">
             <a:avLst/>
@@ -23765,8 +23765,8 @@
         </p:blipFill>
         <p:spPr>
           <a:xfrm>
-            <a:off x="7741310" y="3241548"/>
-            <a:ext cx="1311250" cy="1828800"/>
+            <a:off x="8009412" y="1897380"/>
+            <a:ext cx="1043148" cy="1417320"/>
           </a:xfrm>
           <a:prstGeom prst="rect">
             <a:avLst/>
@@ -24700,7 +24700,7 @@
         <p:spPr>
           <a:xfrm>
             <a:off x="91440" y="3653028"/>
-            <a:ext cx="2371176" cy="1417320"/>
+            <a:ext cx="1133856" cy="1417320"/>
           </a:xfrm>
           <a:prstGeom prst="rect">
             <a:avLst/>
@@ -24723,8 +24723,8 @@
         </p:blipFill>
         <p:spPr>
           <a:xfrm>
-            <a:off x="8245785" y="3515868"/>
-            <a:ext cx="806775" cy="1554480"/>
+            <a:off x="7570043" y="3653028"/>
+            <a:ext cx="1482517" cy="1417320"/>
           </a:xfrm>
           <a:prstGeom prst="rect">
             <a:avLst/>
@@ -25919,8 +25919,8 @@
         </p:blipFill>
         <p:spPr>
           <a:xfrm>
-            <a:off x="91440" y="2080260"/>
-            <a:ext cx="520522" cy="1051560"/>
+            <a:off x="91440" y="2125980"/>
+            <a:ext cx="507903" cy="960120"/>
           </a:xfrm>
           <a:prstGeom prst="rect">
             <a:avLst/>
@@ -27042,8 +27042,8 @@
         </p:blipFill>
         <p:spPr>
           <a:xfrm>
-            <a:off x="8479048" y="3790188"/>
-            <a:ext cx="573512" cy="1280160"/>
+            <a:off x="8480786" y="3881628"/>
+            <a:ext cx="571774" cy="1188720"/>
           </a:xfrm>
           <a:prstGeom prst="rect">
             <a:avLst/>
@@ -28039,7 +28039,7 @@
         <p:spPr>
           <a:xfrm>
             <a:off x="91440" y="3653028"/>
-            <a:ext cx="729920" cy="1417320"/>
+            <a:ext cx="717164" cy="1417320"/>
           </a:xfrm>
           <a:prstGeom prst="rect">
             <a:avLst/>
@@ -28062,8 +28062,8 @@
         </p:blipFill>
         <p:spPr>
           <a:xfrm>
-            <a:off x="7903799" y="3515868"/>
-            <a:ext cx="1148761" cy="1554480"/>
+            <a:off x="7742591" y="3744468"/>
+            <a:ext cx="1309969" cy="1325880"/>
           </a:xfrm>
           <a:prstGeom prst="rect">
             <a:avLst/>
@@ -29067,30 +29067,6 @@
           </a:p>
         </p:txBody>
       </p:sp>
-      <p:pic>
-        <p:nvPicPr>
-          <p:cNvPr id="21" name="Image 0" descr="animal">    </p:cNvPr>
-          <p:cNvPicPr>
-            <a:picLocks noChangeAspect="1"/>
-          </p:cNvPicPr>
-          <p:nvPr/>
-        </p:nvPicPr>
-        <p:blipFill>
-          <a:blip r:embed="rId1"/>
-          <a:stretch>
-            <a:fillRect/>
-          </a:stretch>
-        </p:blipFill>
-        <p:spPr>
-          <a:xfrm>
-            <a:off x="91440" y="3653028"/>
-            <a:ext cx="1019053" cy="1417320"/>
-          </a:xfrm>
-          <a:prstGeom prst="rect">
-            <a:avLst/>
-          </a:prstGeom>
-        </p:spPr>
-      </p:pic>
     </p:spTree>
   </p:cSld>
   <p:clrMapOvr>
@@ -30130,7 +30106,7 @@
         <p:spPr>
           <a:xfrm>
             <a:off x="91440" y="3653028"/>
-            <a:ext cx="732754" cy="1417320"/>
+            <a:ext cx="708660" cy="1417320"/>
           </a:xfrm>
           <a:prstGeom prst="rect">
             <a:avLst/>
@@ -30153,8 +30129,8 @@
         </p:blipFill>
         <p:spPr>
           <a:xfrm>
-            <a:off x="7965978" y="3515868"/>
-            <a:ext cx="1086582" cy="1554480"/>
+            <a:off x="8103230" y="3744468"/>
+            <a:ext cx="949330" cy="1325880"/>
           </a:xfrm>
           <a:prstGeom prst="rect">
             <a:avLst/>
@@ -31287,8 +31263,8 @@
         </p:blipFill>
         <p:spPr>
           <a:xfrm>
-            <a:off x="91440" y="3561588"/>
-            <a:ext cx="1041044" cy="1508760"/>
+            <a:off x="91440" y="4064508"/>
+            <a:ext cx="1217066" cy="1005840"/>
           </a:xfrm>
           <a:prstGeom prst="rect">
             <a:avLst/>
@@ -31311,8 +31287,8 @@
         </p:blipFill>
         <p:spPr>
           <a:xfrm>
-            <a:off x="6463894" y="3332988"/>
-            <a:ext cx="2588666" cy="1737360"/>
+            <a:off x="7986187" y="3790188"/>
+            <a:ext cx="1066373" cy="1280160"/>
           </a:xfrm>
           <a:prstGeom prst="rect">
             <a:avLst/>

--- a/fathah-plus/01-alif.pptx
+++ b/fathah-plus/01-alif.pptx
@@ -4,6 +4,9 @@
   <p:sldMasterIdLst>
     <p:sldMasterId id="2147483648" r:id="rId1"/>
   </p:sldMasterIdLst>
+  <p:notesMasterIdLst>
+    <p:notesMasterId r:id="rId28"/>
+  </p:notesMasterIdLst>
   <p:sldIdLst>
     <p:sldId id="256" r:id="rId2"/>
     <p:sldId id="257" r:id="rId3"/>
@@ -32,9 +35,6 @@
     <p:sldId id="280" r:id="rId26"/>
     <p:sldId id="281" r:id="rId27"/>
   </p:sldIdLst>
-  <p:notesMasterIdLst>
-    <p:notesMasterId r:id="rId28"/>
-  </p:notesMasterIdLst>
   <p:sldSz cx="9144000" cy="5143500"/>
   <p:notesSz cx="5143500" cy="9144000"/>
   <p:defaultTextStyle>
